--- a/ppts_output_v3/17_烟叶税风险指引.pptx
+++ b/ppts_output_v3/17_烟叶税风险指引.pptx
@@ -3298,7 +3298,7 @@
           <a:p>
             <a:pPr algn="l">
               <a:lnSpc>
-                <a:spcPts val="1820"/>
+                <a:spcPts val="2080"/>
               </a:lnSpc>
               <a:spcBef>
                 <a:spcPts val="0"/>
@@ -3308,7 +3308,7 @@
               </a:spcAft>
             </a:pPr>
             <a:r>
-              <a:rPr sz="1400" b="1">
+              <a:rPr sz="1600" b="1">
                 <a:solidFill>
                   <a:srgbClr val="1B3A5C"/>
                 </a:solidFill>
@@ -3320,7 +3320,7 @@
           <a:p>
             <a:pPr algn="l">
               <a:lnSpc>
-                <a:spcPts val="1820"/>
+                <a:spcPts val="2080"/>
               </a:lnSpc>
               <a:spcBef>
                 <a:spcPts val="800"/>
@@ -3330,7 +3330,7 @@
               </a:spcAft>
             </a:pPr>
             <a:r>
-              <a:rPr sz="1400" b="1">
+              <a:rPr sz="1600" b="1">
                 <a:solidFill>
                   <a:srgbClr val="333333"/>
                 </a:solidFill>
@@ -3342,7 +3342,7 @@
           <a:p>
             <a:pPr algn="l">
               <a:lnSpc>
-                <a:spcPts val="1430"/>
+                <a:spcPts val="1820"/>
               </a:lnSpc>
               <a:spcBef>
                 <a:spcPts val="200"/>
@@ -3352,7 +3352,7 @@
               </a:spcAft>
             </a:pPr>
             <a:r>
-              <a:rPr sz="1100" b="0">
+              <a:rPr sz="1400" b="0">
                 <a:solidFill>
                   <a:srgbClr val="000000"/>
                 </a:solidFill>
@@ -3364,7 +3364,7 @@
           <a:p>
             <a:pPr algn="l">
               <a:lnSpc>
-                <a:spcPts val="1820"/>
+                <a:spcPts val="2080"/>
               </a:lnSpc>
               <a:spcBef>
                 <a:spcPts val="800"/>
@@ -3374,7 +3374,7 @@
               </a:spcAft>
             </a:pPr>
             <a:r>
-              <a:rPr sz="1400" b="1">
+              <a:rPr sz="1600" b="1">
                 <a:solidFill>
                   <a:srgbClr val="1B5C9E"/>
                 </a:solidFill>
@@ -3386,7 +3386,7 @@
           <a:p>
             <a:pPr algn="l">
               <a:lnSpc>
-                <a:spcPts val="1430"/>
+                <a:spcPts val="1820"/>
               </a:lnSpc>
               <a:spcBef>
                 <a:spcPts val="200"/>
@@ -3396,7 +3396,7 @@
               </a:spcAft>
             </a:pPr>
             <a:r>
-              <a:rPr sz="1100" b="0">
+              <a:rPr sz="1400" b="0">
                 <a:solidFill>
                   <a:srgbClr val="000000"/>
                 </a:solidFill>
@@ -3408,7 +3408,7 @@
           <a:p>
             <a:pPr algn="l">
               <a:lnSpc>
-                <a:spcPts val="1820"/>
+                <a:spcPts val="2080"/>
               </a:lnSpc>
               <a:spcBef>
                 <a:spcPts val="800"/>
@@ -3418,7 +3418,7 @@
               </a:spcAft>
             </a:pPr>
             <a:r>
-              <a:rPr sz="1400" b="1">
+              <a:rPr sz="1600" b="1">
                 <a:solidFill>
                   <a:srgbClr val="CC3333"/>
                 </a:solidFill>
@@ -3430,7 +3430,7 @@
           <a:p>
             <a:pPr algn="l">
               <a:lnSpc>
-                <a:spcPts val="1430"/>
+                <a:spcPts val="1820"/>
               </a:lnSpc>
               <a:spcBef>
                 <a:spcPts val="200"/>
@@ -3440,7 +3440,7 @@
               </a:spcAft>
             </a:pPr>
             <a:r>
-              <a:rPr sz="1100" b="0">
+              <a:rPr sz="1400" b="0">
                 <a:solidFill>
                   <a:srgbClr val="000000"/>
                 </a:solidFill>
@@ -3452,7 +3452,7 @@
           <a:p>
             <a:pPr algn="l">
               <a:lnSpc>
-                <a:spcPts val="1820"/>
+                <a:spcPts val="2080"/>
               </a:lnSpc>
               <a:spcBef>
                 <a:spcPts val="800"/>
@@ -3462,7 +3462,7 @@
               </a:spcAft>
             </a:pPr>
             <a:r>
-              <a:rPr sz="1400" b="1">
+              <a:rPr sz="1600" b="1">
                 <a:solidFill>
                   <a:srgbClr val="008040"/>
                 </a:solidFill>
@@ -3474,7 +3474,7 @@
           <a:p>
             <a:pPr algn="l">
               <a:lnSpc>
-                <a:spcPts val="1430"/>
+                <a:spcPts val="1820"/>
               </a:lnSpc>
               <a:spcBef>
                 <a:spcPts val="200"/>
@@ -3484,7 +3484,7 @@
               </a:spcAft>
             </a:pPr>
             <a:r>
-              <a:rPr sz="1100" b="0">
+              <a:rPr sz="1400" b="0">
                 <a:solidFill>
                   <a:srgbClr val="000000"/>
                 </a:solidFill>
@@ -3589,7 +3589,7 @@
           <a:p>
             <a:pPr algn="l">
               <a:lnSpc>
-                <a:spcPts val="1820"/>
+                <a:spcPts val="2080"/>
               </a:lnSpc>
               <a:spcBef>
                 <a:spcPts val="0"/>
@@ -3599,7 +3599,7 @@
               </a:spcAft>
             </a:pPr>
             <a:r>
-              <a:rPr sz="1400" b="1">
+              <a:rPr sz="1600" b="1">
                 <a:solidFill>
                   <a:srgbClr val="1B3A5C"/>
                 </a:solidFill>
@@ -3611,7 +3611,7 @@
           <a:p>
             <a:pPr algn="l">
               <a:lnSpc>
-                <a:spcPts val="1820"/>
+                <a:spcPts val="2080"/>
               </a:lnSpc>
               <a:spcBef>
                 <a:spcPts val="800"/>
@@ -3621,7 +3621,7 @@
               </a:spcAft>
             </a:pPr>
             <a:r>
-              <a:rPr sz="1400" b="1">
+              <a:rPr sz="1600" b="1">
                 <a:solidFill>
                   <a:srgbClr val="333333"/>
                 </a:solidFill>
@@ -3633,7 +3633,7 @@
           <a:p>
             <a:pPr algn="l">
               <a:lnSpc>
-                <a:spcPts val="1430"/>
+                <a:spcPts val="1820"/>
               </a:lnSpc>
               <a:spcBef>
                 <a:spcPts val="200"/>
@@ -3643,7 +3643,7 @@
               </a:spcAft>
             </a:pPr>
             <a:r>
-              <a:rPr sz="1100" b="0">
+              <a:rPr sz="1400" b="0">
                 <a:solidFill>
                   <a:srgbClr val="000000"/>
                 </a:solidFill>
@@ -3655,7 +3655,7 @@
           <a:p>
             <a:pPr algn="l">
               <a:lnSpc>
-                <a:spcPts val="1820"/>
+                <a:spcPts val="2080"/>
               </a:lnSpc>
               <a:spcBef>
                 <a:spcPts val="800"/>
@@ -3665,7 +3665,7 @@
               </a:spcAft>
             </a:pPr>
             <a:r>
-              <a:rPr sz="1400" b="1">
+              <a:rPr sz="1600" b="1">
                 <a:solidFill>
                   <a:srgbClr val="1B5C9E"/>
                 </a:solidFill>
@@ -3677,7 +3677,7 @@
           <a:p>
             <a:pPr algn="l">
               <a:lnSpc>
-                <a:spcPts val="1430"/>
+                <a:spcPts val="1820"/>
               </a:lnSpc>
               <a:spcBef>
                 <a:spcPts val="200"/>
@@ -3687,7 +3687,7 @@
               </a:spcAft>
             </a:pPr>
             <a:r>
-              <a:rPr sz="1100" b="0">
+              <a:rPr sz="1400" b="0">
                 <a:solidFill>
                   <a:srgbClr val="000000"/>
                 </a:solidFill>
@@ -3699,7 +3699,7 @@
           <a:p>
             <a:pPr algn="l">
               <a:lnSpc>
-                <a:spcPts val="1820"/>
+                <a:spcPts val="2080"/>
               </a:lnSpc>
               <a:spcBef>
                 <a:spcPts val="800"/>
@@ -3709,7 +3709,7 @@
               </a:spcAft>
             </a:pPr>
             <a:r>
-              <a:rPr sz="1400" b="1">
+              <a:rPr sz="1600" b="1">
                 <a:solidFill>
                   <a:srgbClr val="CC3333"/>
                 </a:solidFill>
@@ -3721,7 +3721,7 @@
           <a:p>
             <a:pPr algn="l">
               <a:lnSpc>
-                <a:spcPts val="1430"/>
+                <a:spcPts val="1820"/>
               </a:lnSpc>
               <a:spcBef>
                 <a:spcPts val="200"/>
@@ -3731,7 +3731,7 @@
               </a:spcAft>
             </a:pPr>
             <a:r>
-              <a:rPr sz="1100" b="0">
+              <a:rPr sz="1400" b="0">
                 <a:solidFill>
                   <a:srgbClr val="000000"/>
                 </a:solidFill>
@@ -3743,7 +3743,7 @@
           <a:p>
             <a:pPr algn="l">
               <a:lnSpc>
-                <a:spcPts val="1820"/>
+                <a:spcPts val="2080"/>
               </a:lnSpc>
               <a:spcBef>
                 <a:spcPts val="800"/>
@@ -3753,7 +3753,7 @@
               </a:spcAft>
             </a:pPr>
             <a:r>
-              <a:rPr sz="1400" b="1">
+              <a:rPr sz="1600" b="1">
                 <a:solidFill>
                   <a:srgbClr val="008040"/>
                 </a:solidFill>
@@ -3765,7 +3765,7 @@
           <a:p>
             <a:pPr algn="l">
               <a:lnSpc>
-                <a:spcPts val="1430"/>
+                <a:spcPts val="1820"/>
               </a:lnSpc>
               <a:spcBef>
                 <a:spcPts val="200"/>
@@ -3775,7 +3775,7 @@
               </a:spcAft>
             </a:pPr>
             <a:r>
-              <a:rPr sz="1100" b="0">
+              <a:rPr sz="1400" b="0">
                 <a:solidFill>
                   <a:srgbClr val="000000"/>
                 </a:solidFill>
@@ -3880,7 +3880,7 @@
           <a:p>
             <a:pPr algn="l">
               <a:lnSpc>
-                <a:spcPts val="1820"/>
+                <a:spcPts val="2080"/>
               </a:lnSpc>
               <a:spcBef>
                 <a:spcPts val="0"/>
@@ -3890,7 +3890,7 @@
               </a:spcAft>
             </a:pPr>
             <a:r>
-              <a:rPr sz="1400" b="1">
+              <a:rPr sz="1600" b="1">
                 <a:solidFill>
                   <a:srgbClr val="1B3A5C"/>
                 </a:solidFill>
@@ -3902,7 +3902,7 @@
           <a:p>
             <a:pPr algn="l">
               <a:lnSpc>
-                <a:spcPts val="1820"/>
+                <a:spcPts val="2080"/>
               </a:lnSpc>
               <a:spcBef>
                 <a:spcPts val="800"/>
@@ -3912,7 +3912,7 @@
               </a:spcAft>
             </a:pPr>
             <a:r>
-              <a:rPr sz="1400" b="1">
+              <a:rPr sz="1600" b="1">
                 <a:solidFill>
                   <a:srgbClr val="333333"/>
                 </a:solidFill>
@@ -3924,7 +3924,7 @@
           <a:p>
             <a:pPr algn="l">
               <a:lnSpc>
-                <a:spcPts val="1430"/>
+                <a:spcPts val="1820"/>
               </a:lnSpc>
               <a:spcBef>
                 <a:spcPts val="200"/>
@@ -3934,7 +3934,7 @@
               </a:spcAft>
             </a:pPr>
             <a:r>
-              <a:rPr sz="1100" b="0">
+              <a:rPr sz="1400" b="0">
                 <a:solidFill>
                   <a:srgbClr val="000000"/>
                 </a:solidFill>
@@ -3946,7 +3946,7 @@
           <a:p>
             <a:pPr algn="l">
               <a:lnSpc>
-                <a:spcPts val="1820"/>
+                <a:spcPts val="2080"/>
               </a:lnSpc>
               <a:spcBef>
                 <a:spcPts val="800"/>
@@ -3956,7 +3956,7 @@
               </a:spcAft>
             </a:pPr>
             <a:r>
-              <a:rPr sz="1400" b="1">
+              <a:rPr sz="1600" b="1">
                 <a:solidFill>
                   <a:srgbClr val="1B5C9E"/>
                 </a:solidFill>
@@ -3968,7 +3968,7 @@
           <a:p>
             <a:pPr algn="l">
               <a:lnSpc>
-                <a:spcPts val="1430"/>
+                <a:spcPts val="1820"/>
               </a:lnSpc>
               <a:spcBef>
                 <a:spcPts val="200"/>
@@ -3978,7 +3978,7 @@
               </a:spcAft>
             </a:pPr>
             <a:r>
-              <a:rPr sz="1100" b="0">
+              <a:rPr sz="1400" b="0">
                 <a:solidFill>
                   <a:srgbClr val="000000"/>
                 </a:solidFill>
@@ -3990,7 +3990,7 @@
           <a:p>
             <a:pPr algn="l">
               <a:lnSpc>
-                <a:spcPts val="1820"/>
+                <a:spcPts val="2080"/>
               </a:lnSpc>
               <a:spcBef>
                 <a:spcPts val="800"/>
@@ -4000,7 +4000,7 @@
               </a:spcAft>
             </a:pPr>
             <a:r>
-              <a:rPr sz="1400" b="1">
+              <a:rPr sz="1600" b="1">
                 <a:solidFill>
                   <a:srgbClr val="CC3333"/>
                 </a:solidFill>
@@ -4012,7 +4012,7 @@
           <a:p>
             <a:pPr algn="l">
               <a:lnSpc>
-                <a:spcPts val="1430"/>
+                <a:spcPts val="1820"/>
               </a:lnSpc>
               <a:spcBef>
                 <a:spcPts val="200"/>
@@ -4022,7 +4022,7 @@
               </a:spcAft>
             </a:pPr>
             <a:r>
-              <a:rPr sz="1100" b="0">
+              <a:rPr sz="1400" b="0">
                 <a:solidFill>
                   <a:srgbClr val="000000"/>
                 </a:solidFill>
@@ -4034,7 +4034,7 @@
           <a:p>
             <a:pPr algn="l">
               <a:lnSpc>
-                <a:spcPts val="1820"/>
+                <a:spcPts val="2080"/>
               </a:lnSpc>
               <a:spcBef>
                 <a:spcPts val="800"/>
@@ -4044,7 +4044,7 @@
               </a:spcAft>
             </a:pPr>
             <a:r>
-              <a:rPr sz="1400" b="1">
+              <a:rPr sz="1600" b="1">
                 <a:solidFill>
                   <a:srgbClr val="008040"/>
                 </a:solidFill>
@@ -4056,7 +4056,7 @@
           <a:p>
             <a:pPr algn="l">
               <a:lnSpc>
-                <a:spcPts val="1430"/>
+                <a:spcPts val="1820"/>
               </a:lnSpc>
               <a:spcBef>
                 <a:spcPts val="200"/>
@@ -4066,7 +4066,7 @@
               </a:spcAft>
             </a:pPr>
             <a:r>
-              <a:rPr sz="1100" b="0">
+              <a:rPr sz="1400" b="0">
                 <a:solidFill>
                   <a:srgbClr val="000000"/>
                 </a:solidFill>
@@ -4078,7 +4078,7 @@
           <a:p>
             <a:pPr algn="l">
               <a:lnSpc>
-                <a:spcPts val="1430"/>
+                <a:spcPts val="1820"/>
               </a:lnSpc>
               <a:spcBef>
                 <a:spcPts val="200"/>
@@ -4088,7 +4088,7 @@
               </a:spcAft>
             </a:pPr>
             <a:r>
-              <a:rPr sz="1100" b="0">
+              <a:rPr sz="1400" b="0">
                 <a:solidFill>
                   <a:srgbClr val="000000"/>
                 </a:solidFill>

--- a/ppts_output_v3/17_烟叶税风险指引.pptx
+++ b/ppts_output_v3/17_烟叶税风险指引.pptx
@@ -4073,28 +4073,6 @@
                 <a:latin typeface="Microsoft YaHei"/>
               </a:rPr>
               <a:t>企业应据实向烟叶收购地的主管税务机关申报纳税。</a:t>
-            </a:r>
-          </a:p>
-          <a:p>
-            <a:pPr algn="l">
-              <a:lnSpc>
-                <a:spcPts val="1820"/>
-              </a:lnSpc>
-              <a:spcBef>
-                <a:spcPts val="200"/>
-              </a:spcBef>
-              <a:spcAft>
-                <a:spcPts val="200"/>
-              </a:spcAft>
-            </a:pPr>
-            <a:r>
-              <a:rPr sz="1400" b="0">
-                <a:solidFill>
-                  <a:srgbClr val="000000"/>
-                </a:solidFill>
-                <a:latin typeface="Microsoft YaHei"/>
-              </a:rPr>
-              <a:t>338</a:t>
             </a:r>
           </a:p>
         </p:txBody>

--- a/ppts_output_v3/17_烟叶税风险指引.pptx
+++ b/ppts_output_v3/17_烟叶税风险指引.pptx
@@ -3358,7 +3358,7 @@
                 </a:solidFill>
                 <a:latin typeface="Microsoft YaHei"/>
               </a:rPr>
-              <a:t>企业申报的价款总额未包括价外补贴，或价外补贴未统一按烟叶收购价款的 10%计算。</a:t>
+              <a:t>企业申报的价款总额未包括价外补贴，或价外补贴未统一按烟叶收购价款的10%计算。</a:t>
             </a:r>
           </a:p>
           <a:p>
@@ -3402,7 +3402,7 @@
                 </a:solidFill>
                 <a:latin typeface="Microsoft YaHei"/>
               </a:rPr>
-              <a:t>根据《中华人民共和国烟叶税法》第三条的规定：烟叶税的计税依据为纳税人收购烟叶实际支付的价款总额。《财政部 税务总局关于明确烟叶税计税依据的通知》（财税〔2018〕75 号）纳税人收购烟叶实际支付的价款总额包括纳税人支付给烟叶生产销售单位和个人的烟叶收购价款和价外补贴。其中，价外补贴统一按烟叶收购价款的 10%计算。</a:t>
+              <a:t>根据《中华人民共和国烟叶税法》第三条的规定：烟叶税的计税依据为纳税人收购烟叶实际支付的价款总额。《财政部 税务总局关于明确烟叶税计税依据的通知》（财税〔2018〕75号）纳税人收购烟叶实际支付的价款总额包括纳税人支付给烟叶生产销售单位和个人的烟叶收购价款和价外补贴。其中，价外补贴统一按烟叶收购价款的10%计算。</a:t>
             </a:r>
           </a:p>
           <a:p>
@@ -3490,7 +3490,7 @@
                 </a:solidFill>
                 <a:latin typeface="Microsoft YaHei"/>
               </a:rPr>
-              <a:t>企业申报烟叶税时，无论实际支付的价外费用是多少，都应按支付价款的 10%核算价外费用，并将价款及价外费用共同申报为烟叶税计税依据。</a:t>
+              <a:t>企业申报烟叶税时，无论实际支付的价外费用是多少，都应按支付价款的10%核算价外费用，并将价款及价外费用共同申报为烟叶税计税依据。</a:t>
             </a:r>
           </a:p>
         </p:txBody>

--- a/ppts_output_v3/17_烟叶税风险指引.pptx
+++ b/ppts_output_v3/17_烟叶税风险指引.pptx
@@ -3294,11 +3294,10 @@
             <a:spAutoFit/>
           </a:bodyPr>
           <a:lstStyle/>
-          <a:p/>
           <a:p>
             <a:pPr algn="l">
               <a:lnSpc>
-                <a:spcPts val="2080"/>
+                <a:spcPct val="125000"/>
               </a:lnSpc>
               <a:spcBef>
                 <a:spcPts val="0"/>
@@ -3320,7 +3319,7 @@
           <a:p>
             <a:pPr algn="l">
               <a:lnSpc>
-                <a:spcPts val="2080"/>
+                <a:spcPct val="125000"/>
               </a:lnSpc>
               <a:spcBef>
                 <a:spcPts val="800"/>
@@ -3342,7 +3341,7 @@
           <a:p>
             <a:pPr algn="l">
               <a:lnSpc>
-                <a:spcPts val="1820"/>
+                <a:spcPct val="125000"/>
               </a:lnSpc>
               <a:spcBef>
                 <a:spcPts val="200"/>
@@ -3364,7 +3363,7 @@
           <a:p>
             <a:pPr algn="l">
               <a:lnSpc>
-                <a:spcPts val="2080"/>
+                <a:spcPct val="125000"/>
               </a:lnSpc>
               <a:spcBef>
                 <a:spcPts val="800"/>
@@ -3386,7 +3385,7 @@
           <a:p>
             <a:pPr algn="l">
               <a:lnSpc>
-                <a:spcPts val="1820"/>
+                <a:spcPct val="125000"/>
               </a:lnSpc>
               <a:spcBef>
                 <a:spcPts val="200"/>
@@ -3408,7 +3407,7 @@
           <a:p>
             <a:pPr algn="l">
               <a:lnSpc>
-                <a:spcPts val="2080"/>
+                <a:spcPct val="125000"/>
               </a:lnSpc>
               <a:spcBef>
                 <a:spcPts val="800"/>
@@ -3430,7 +3429,7 @@
           <a:p>
             <a:pPr algn="l">
               <a:lnSpc>
-                <a:spcPts val="1820"/>
+                <a:spcPct val="125000"/>
               </a:lnSpc>
               <a:spcBef>
                 <a:spcPts val="200"/>
@@ -3452,7 +3451,7 @@
           <a:p>
             <a:pPr algn="l">
               <a:lnSpc>
-                <a:spcPts val="2080"/>
+                <a:spcPct val="125000"/>
               </a:lnSpc>
               <a:spcBef>
                 <a:spcPts val="800"/>
@@ -3474,7 +3473,7 @@
           <a:p>
             <a:pPr algn="l">
               <a:lnSpc>
-                <a:spcPts val="1820"/>
+                <a:spcPct val="125000"/>
               </a:lnSpc>
               <a:spcBef>
                 <a:spcPts val="200"/>
@@ -3585,11 +3584,10 @@
             <a:spAutoFit/>
           </a:bodyPr>
           <a:lstStyle/>
-          <a:p/>
           <a:p>
             <a:pPr algn="l">
               <a:lnSpc>
-                <a:spcPts val="2080"/>
+                <a:spcPct val="125000"/>
               </a:lnSpc>
               <a:spcBef>
                 <a:spcPts val="0"/>
@@ -3611,7 +3609,7 @@
           <a:p>
             <a:pPr algn="l">
               <a:lnSpc>
-                <a:spcPts val="2080"/>
+                <a:spcPct val="125000"/>
               </a:lnSpc>
               <a:spcBef>
                 <a:spcPts val="800"/>
@@ -3633,7 +3631,7 @@
           <a:p>
             <a:pPr algn="l">
               <a:lnSpc>
-                <a:spcPts val="1820"/>
+                <a:spcPct val="125000"/>
               </a:lnSpc>
               <a:spcBef>
                 <a:spcPts val="200"/>
@@ -3655,7 +3653,7 @@
           <a:p>
             <a:pPr algn="l">
               <a:lnSpc>
-                <a:spcPts val="2080"/>
+                <a:spcPct val="125000"/>
               </a:lnSpc>
               <a:spcBef>
                 <a:spcPts val="800"/>
@@ -3677,7 +3675,7 @@
           <a:p>
             <a:pPr algn="l">
               <a:lnSpc>
-                <a:spcPts val="1820"/>
+                <a:spcPct val="125000"/>
               </a:lnSpc>
               <a:spcBef>
                 <a:spcPts val="200"/>
@@ -3699,7 +3697,7 @@
           <a:p>
             <a:pPr algn="l">
               <a:lnSpc>
-                <a:spcPts val="2080"/>
+                <a:spcPct val="125000"/>
               </a:lnSpc>
               <a:spcBef>
                 <a:spcPts val="800"/>
@@ -3721,7 +3719,7 @@
           <a:p>
             <a:pPr algn="l">
               <a:lnSpc>
-                <a:spcPts val="1820"/>
+                <a:spcPct val="125000"/>
               </a:lnSpc>
               <a:spcBef>
                 <a:spcPts val="200"/>
@@ -3743,7 +3741,7 @@
           <a:p>
             <a:pPr algn="l">
               <a:lnSpc>
-                <a:spcPts val="2080"/>
+                <a:spcPct val="125000"/>
               </a:lnSpc>
               <a:spcBef>
                 <a:spcPts val="800"/>
@@ -3765,7 +3763,7 @@
           <a:p>
             <a:pPr algn="l">
               <a:lnSpc>
-                <a:spcPts val="1820"/>
+                <a:spcPct val="125000"/>
               </a:lnSpc>
               <a:spcBef>
                 <a:spcPts val="200"/>
@@ -3876,11 +3874,10 @@
             <a:spAutoFit/>
           </a:bodyPr>
           <a:lstStyle/>
-          <a:p/>
           <a:p>
             <a:pPr algn="l">
               <a:lnSpc>
-                <a:spcPts val="2080"/>
+                <a:spcPct val="125000"/>
               </a:lnSpc>
               <a:spcBef>
                 <a:spcPts val="0"/>
@@ -3902,7 +3899,7 @@
           <a:p>
             <a:pPr algn="l">
               <a:lnSpc>
-                <a:spcPts val="2080"/>
+                <a:spcPct val="125000"/>
               </a:lnSpc>
               <a:spcBef>
                 <a:spcPts val="800"/>
@@ -3924,7 +3921,7 @@
           <a:p>
             <a:pPr algn="l">
               <a:lnSpc>
-                <a:spcPts val="1820"/>
+                <a:spcPct val="125000"/>
               </a:lnSpc>
               <a:spcBef>
                 <a:spcPts val="200"/>
@@ -3946,7 +3943,7 @@
           <a:p>
             <a:pPr algn="l">
               <a:lnSpc>
-                <a:spcPts val="2080"/>
+                <a:spcPct val="125000"/>
               </a:lnSpc>
               <a:spcBef>
                 <a:spcPts val="800"/>
@@ -3968,7 +3965,7 @@
           <a:p>
             <a:pPr algn="l">
               <a:lnSpc>
-                <a:spcPts val="1820"/>
+                <a:spcPct val="125000"/>
               </a:lnSpc>
               <a:spcBef>
                 <a:spcPts val="200"/>
@@ -3990,7 +3987,7 @@
           <a:p>
             <a:pPr algn="l">
               <a:lnSpc>
-                <a:spcPts val="2080"/>
+                <a:spcPct val="125000"/>
               </a:lnSpc>
               <a:spcBef>
                 <a:spcPts val="800"/>
@@ -4012,7 +4009,7 @@
           <a:p>
             <a:pPr algn="l">
               <a:lnSpc>
-                <a:spcPts val="1820"/>
+                <a:spcPct val="125000"/>
               </a:lnSpc>
               <a:spcBef>
                 <a:spcPts val="200"/>
@@ -4034,7 +4031,7 @@
           <a:p>
             <a:pPr algn="l">
               <a:lnSpc>
-                <a:spcPts val="2080"/>
+                <a:spcPct val="125000"/>
               </a:lnSpc>
               <a:spcBef>
                 <a:spcPts val="800"/>
@@ -4056,7 +4053,7 @@
           <a:p>
             <a:pPr algn="l">
               <a:lnSpc>
-                <a:spcPts val="1820"/>
+                <a:spcPct val="125000"/>
               </a:lnSpc>
               <a:spcBef>
                 <a:spcPts val="200"/>

--- a/ppts_output_v3/17_烟叶税风险指引.pptx
+++ b/ppts_output_v3/17_烟叶税风险指引.pptx
@@ -3303,7 +3303,7 @@
                 <a:spcPts val="0"/>
               </a:spcBef>
               <a:spcAft>
-                <a:spcPts val="600"/>
+                <a:spcPts val="0"/>
               </a:spcAft>
             </a:pPr>
             <a:r>
@@ -3322,10 +3322,10 @@
                 <a:spcPct val="125000"/>
               </a:lnSpc>
               <a:spcBef>
-                <a:spcPts val="800"/>
+                <a:spcPts val="0"/>
               </a:spcBef>
               <a:spcAft>
-                <a:spcPts val="300"/>
+                <a:spcPts val="0"/>
               </a:spcAft>
             </a:pPr>
             <a:r>
@@ -3344,10 +3344,10 @@
                 <a:spcPct val="125000"/>
               </a:lnSpc>
               <a:spcBef>
-                <a:spcPts val="200"/>
+                <a:spcPts val="0"/>
               </a:spcBef>
               <a:spcAft>
-                <a:spcPts val="200"/>
+                <a:spcPts val="0"/>
               </a:spcAft>
             </a:pPr>
             <a:r>
@@ -3366,10 +3366,10 @@
                 <a:spcPct val="125000"/>
               </a:lnSpc>
               <a:spcBef>
-                <a:spcPts val="800"/>
+                <a:spcPts val="0"/>
               </a:spcBef>
               <a:spcAft>
-                <a:spcPts val="300"/>
+                <a:spcPts val="0"/>
               </a:spcAft>
             </a:pPr>
             <a:r>
@@ -3388,10 +3388,10 @@
                 <a:spcPct val="125000"/>
               </a:lnSpc>
               <a:spcBef>
-                <a:spcPts val="200"/>
+                <a:spcPts val="0"/>
               </a:spcBef>
               <a:spcAft>
-                <a:spcPts val="200"/>
+                <a:spcPts val="0"/>
               </a:spcAft>
             </a:pPr>
             <a:r>
@@ -3410,10 +3410,10 @@
                 <a:spcPct val="125000"/>
               </a:lnSpc>
               <a:spcBef>
-                <a:spcPts val="800"/>
+                <a:spcPts val="0"/>
               </a:spcBef>
               <a:spcAft>
-                <a:spcPts val="300"/>
+                <a:spcPts val="0"/>
               </a:spcAft>
             </a:pPr>
             <a:r>
@@ -3432,10 +3432,10 @@
                 <a:spcPct val="125000"/>
               </a:lnSpc>
               <a:spcBef>
-                <a:spcPts val="200"/>
+                <a:spcPts val="0"/>
               </a:spcBef>
               <a:spcAft>
-                <a:spcPts val="200"/>
+                <a:spcPts val="0"/>
               </a:spcAft>
             </a:pPr>
             <a:r>
@@ -3454,10 +3454,10 @@
                 <a:spcPct val="125000"/>
               </a:lnSpc>
               <a:spcBef>
-                <a:spcPts val="800"/>
+                <a:spcPts val="0"/>
               </a:spcBef>
               <a:spcAft>
-                <a:spcPts val="300"/>
+                <a:spcPts val="0"/>
               </a:spcAft>
             </a:pPr>
             <a:r>
@@ -3476,10 +3476,10 @@
                 <a:spcPct val="125000"/>
               </a:lnSpc>
               <a:spcBef>
-                <a:spcPts val="200"/>
+                <a:spcPts val="0"/>
               </a:spcBef>
               <a:spcAft>
-                <a:spcPts val="200"/>
+                <a:spcPts val="0"/>
               </a:spcAft>
             </a:pPr>
             <a:r>
@@ -3593,7 +3593,7 @@
                 <a:spcPts val="0"/>
               </a:spcBef>
               <a:spcAft>
-                <a:spcPts val="600"/>
+                <a:spcPts val="0"/>
               </a:spcAft>
             </a:pPr>
             <a:r>
@@ -3612,10 +3612,10 @@
                 <a:spcPct val="125000"/>
               </a:lnSpc>
               <a:spcBef>
-                <a:spcPts val="800"/>
+                <a:spcPts val="0"/>
               </a:spcBef>
               <a:spcAft>
-                <a:spcPts val="300"/>
+                <a:spcPts val="0"/>
               </a:spcAft>
             </a:pPr>
             <a:r>
@@ -3634,10 +3634,10 @@
                 <a:spcPct val="125000"/>
               </a:lnSpc>
               <a:spcBef>
-                <a:spcPts val="200"/>
+                <a:spcPts val="0"/>
               </a:spcBef>
               <a:spcAft>
-                <a:spcPts val="200"/>
+                <a:spcPts val="0"/>
               </a:spcAft>
             </a:pPr>
             <a:r>
@@ -3656,10 +3656,10 @@
                 <a:spcPct val="125000"/>
               </a:lnSpc>
               <a:spcBef>
-                <a:spcPts val="800"/>
+                <a:spcPts val="0"/>
               </a:spcBef>
               <a:spcAft>
-                <a:spcPts val="300"/>
+                <a:spcPts val="0"/>
               </a:spcAft>
             </a:pPr>
             <a:r>
@@ -3678,10 +3678,10 @@
                 <a:spcPct val="125000"/>
               </a:lnSpc>
               <a:spcBef>
-                <a:spcPts val="200"/>
+                <a:spcPts val="0"/>
               </a:spcBef>
               <a:spcAft>
-                <a:spcPts val="200"/>
+                <a:spcPts val="0"/>
               </a:spcAft>
             </a:pPr>
             <a:r>
@@ -3700,10 +3700,10 @@
                 <a:spcPct val="125000"/>
               </a:lnSpc>
               <a:spcBef>
-                <a:spcPts val="800"/>
+                <a:spcPts val="0"/>
               </a:spcBef>
               <a:spcAft>
-                <a:spcPts val="300"/>
+                <a:spcPts val="0"/>
               </a:spcAft>
             </a:pPr>
             <a:r>
@@ -3722,10 +3722,10 @@
                 <a:spcPct val="125000"/>
               </a:lnSpc>
               <a:spcBef>
-                <a:spcPts val="200"/>
+                <a:spcPts val="0"/>
               </a:spcBef>
               <a:spcAft>
-                <a:spcPts val="200"/>
+                <a:spcPts val="0"/>
               </a:spcAft>
             </a:pPr>
             <a:r>
@@ -3744,10 +3744,10 @@
                 <a:spcPct val="125000"/>
               </a:lnSpc>
               <a:spcBef>
-                <a:spcPts val="800"/>
+                <a:spcPts val="0"/>
               </a:spcBef>
               <a:spcAft>
-                <a:spcPts val="300"/>
+                <a:spcPts val="0"/>
               </a:spcAft>
             </a:pPr>
             <a:r>
@@ -3766,10 +3766,10 @@
                 <a:spcPct val="125000"/>
               </a:lnSpc>
               <a:spcBef>
-                <a:spcPts val="200"/>
+                <a:spcPts val="0"/>
               </a:spcBef>
               <a:spcAft>
-                <a:spcPts val="200"/>
+                <a:spcPts val="0"/>
               </a:spcAft>
             </a:pPr>
             <a:r>
@@ -3883,7 +3883,7 @@
                 <a:spcPts val="0"/>
               </a:spcBef>
               <a:spcAft>
-                <a:spcPts val="600"/>
+                <a:spcPts val="0"/>
               </a:spcAft>
             </a:pPr>
             <a:r>
@@ -3902,10 +3902,10 @@
                 <a:spcPct val="125000"/>
               </a:lnSpc>
               <a:spcBef>
-                <a:spcPts val="800"/>
+                <a:spcPts val="0"/>
               </a:spcBef>
               <a:spcAft>
-                <a:spcPts val="300"/>
+                <a:spcPts val="0"/>
               </a:spcAft>
             </a:pPr>
             <a:r>
@@ -3924,10 +3924,10 @@
                 <a:spcPct val="125000"/>
               </a:lnSpc>
               <a:spcBef>
-                <a:spcPts val="200"/>
+                <a:spcPts val="0"/>
               </a:spcBef>
               <a:spcAft>
-                <a:spcPts val="200"/>
+                <a:spcPts val="0"/>
               </a:spcAft>
             </a:pPr>
             <a:r>
@@ -3946,10 +3946,10 @@
                 <a:spcPct val="125000"/>
               </a:lnSpc>
               <a:spcBef>
-                <a:spcPts val="800"/>
+                <a:spcPts val="0"/>
               </a:spcBef>
               <a:spcAft>
-                <a:spcPts val="300"/>
+                <a:spcPts val="0"/>
               </a:spcAft>
             </a:pPr>
             <a:r>
@@ -3968,10 +3968,10 @@
                 <a:spcPct val="125000"/>
               </a:lnSpc>
               <a:spcBef>
-                <a:spcPts val="200"/>
+                <a:spcPts val="0"/>
               </a:spcBef>
               <a:spcAft>
-                <a:spcPts val="200"/>
+                <a:spcPts val="0"/>
               </a:spcAft>
             </a:pPr>
             <a:r>
@@ -3990,10 +3990,10 @@
                 <a:spcPct val="125000"/>
               </a:lnSpc>
               <a:spcBef>
-                <a:spcPts val="800"/>
+                <a:spcPts val="0"/>
               </a:spcBef>
               <a:spcAft>
-                <a:spcPts val="300"/>
+                <a:spcPts val="0"/>
               </a:spcAft>
             </a:pPr>
             <a:r>
@@ -4012,10 +4012,10 @@
                 <a:spcPct val="125000"/>
               </a:lnSpc>
               <a:spcBef>
-                <a:spcPts val="200"/>
+                <a:spcPts val="0"/>
               </a:spcBef>
               <a:spcAft>
-                <a:spcPts val="200"/>
+                <a:spcPts val="0"/>
               </a:spcAft>
             </a:pPr>
             <a:r>
@@ -4034,10 +4034,10 @@
                 <a:spcPct val="125000"/>
               </a:lnSpc>
               <a:spcBef>
-                <a:spcPts val="800"/>
+                <a:spcPts val="0"/>
               </a:spcBef>
               <a:spcAft>
-                <a:spcPts val="300"/>
+                <a:spcPts val="0"/>
               </a:spcAft>
             </a:pPr>
             <a:r>
@@ -4056,10 +4056,10 @@
                 <a:spcPct val="125000"/>
               </a:lnSpc>
               <a:spcBef>
-                <a:spcPts val="200"/>
+                <a:spcPts val="0"/>
               </a:spcBef>
               <a:spcAft>
-                <a:spcPts val="200"/>
+                <a:spcPts val="0"/>
               </a:spcAft>
             </a:pPr>
             <a:r>

--- a/ppts_output_v3/17_烟叶税风险指引.pptx
+++ b/ppts_output_v3/17_烟叶税风险指引.pptx
@@ -3261,7 +3261,7 @@
           <a:bodyPr rtlCol="0" anchor="ctr" wrap="square" lIns="365760"/>
           <a:lstStyle/>
           <a:p>
-            <a:pPr algn="l"/>
+            <a:pPr algn="just"/>
             <a:r>
               <a:rPr sz="1500" b="1">
                 <a:solidFill>
@@ -3295,7 +3295,7 @@
           </a:bodyPr>
           <a:lstStyle/>
           <a:p>
-            <a:pPr algn="l">
+            <a:pPr algn="just">
               <a:lnSpc>
                 <a:spcPct val="125000"/>
               </a:lnSpc>
@@ -3317,7 +3317,7 @@
             </a:r>
           </a:p>
           <a:p>
-            <a:pPr algn="l">
+            <a:pPr algn="just">
               <a:lnSpc>
                 <a:spcPct val="125000"/>
               </a:lnSpc>
@@ -3339,7 +3339,7 @@
             </a:r>
           </a:p>
           <a:p>
-            <a:pPr algn="l">
+            <a:pPr algn="just">
               <a:lnSpc>
                 <a:spcPct val="125000"/>
               </a:lnSpc>
@@ -3361,7 +3361,7 @@
             </a:r>
           </a:p>
           <a:p>
-            <a:pPr algn="l">
+            <a:pPr algn="just">
               <a:lnSpc>
                 <a:spcPct val="125000"/>
               </a:lnSpc>
@@ -3383,7 +3383,7 @@
             </a:r>
           </a:p>
           <a:p>
-            <a:pPr algn="l">
+            <a:pPr algn="just">
               <a:lnSpc>
                 <a:spcPct val="125000"/>
               </a:lnSpc>
@@ -3405,7 +3405,7 @@
             </a:r>
           </a:p>
           <a:p>
-            <a:pPr algn="l">
+            <a:pPr algn="just">
               <a:lnSpc>
                 <a:spcPct val="125000"/>
               </a:lnSpc>
@@ -3427,7 +3427,7 @@
             </a:r>
           </a:p>
           <a:p>
-            <a:pPr algn="l">
+            <a:pPr algn="just">
               <a:lnSpc>
                 <a:spcPct val="125000"/>
               </a:lnSpc>
@@ -3449,7 +3449,7 @@
             </a:r>
           </a:p>
           <a:p>
-            <a:pPr algn="l">
+            <a:pPr algn="just">
               <a:lnSpc>
                 <a:spcPct val="125000"/>
               </a:lnSpc>
@@ -3471,7 +3471,7 @@
             </a:r>
           </a:p>
           <a:p>
-            <a:pPr algn="l">
+            <a:pPr algn="just">
               <a:lnSpc>
                 <a:spcPct val="125000"/>
               </a:lnSpc>
@@ -3551,7 +3551,7 @@
           <a:bodyPr rtlCol="0" anchor="ctr" wrap="square" lIns="365760"/>
           <a:lstStyle/>
           <a:p>
-            <a:pPr algn="l"/>
+            <a:pPr algn="just"/>
             <a:r>
               <a:rPr sz="1500" b="1">
                 <a:solidFill>
@@ -3585,7 +3585,7 @@
           </a:bodyPr>
           <a:lstStyle/>
           <a:p>
-            <a:pPr algn="l">
+            <a:pPr algn="just">
               <a:lnSpc>
                 <a:spcPct val="125000"/>
               </a:lnSpc>
@@ -3607,7 +3607,7 @@
             </a:r>
           </a:p>
           <a:p>
-            <a:pPr algn="l">
+            <a:pPr algn="just">
               <a:lnSpc>
                 <a:spcPct val="125000"/>
               </a:lnSpc>
@@ -3629,7 +3629,7 @@
             </a:r>
           </a:p>
           <a:p>
-            <a:pPr algn="l">
+            <a:pPr algn="just">
               <a:lnSpc>
                 <a:spcPct val="125000"/>
               </a:lnSpc>
@@ -3651,7 +3651,7 @@
             </a:r>
           </a:p>
           <a:p>
-            <a:pPr algn="l">
+            <a:pPr algn="just">
               <a:lnSpc>
                 <a:spcPct val="125000"/>
               </a:lnSpc>
@@ -3673,7 +3673,7 @@
             </a:r>
           </a:p>
           <a:p>
-            <a:pPr algn="l">
+            <a:pPr algn="just">
               <a:lnSpc>
                 <a:spcPct val="125000"/>
               </a:lnSpc>
@@ -3695,7 +3695,7 @@
             </a:r>
           </a:p>
           <a:p>
-            <a:pPr algn="l">
+            <a:pPr algn="just">
               <a:lnSpc>
                 <a:spcPct val="125000"/>
               </a:lnSpc>
@@ -3717,7 +3717,7 @@
             </a:r>
           </a:p>
           <a:p>
-            <a:pPr algn="l">
+            <a:pPr algn="just">
               <a:lnSpc>
                 <a:spcPct val="125000"/>
               </a:lnSpc>
@@ -3739,7 +3739,7 @@
             </a:r>
           </a:p>
           <a:p>
-            <a:pPr algn="l">
+            <a:pPr algn="just">
               <a:lnSpc>
                 <a:spcPct val="125000"/>
               </a:lnSpc>
@@ -3761,7 +3761,7 @@
             </a:r>
           </a:p>
           <a:p>
-            <a:pPr algn="l">
+            <a:pPr algn="just">
               <a:lnSpc>
                 <a:spcPct val="125000"/>
               </a:lnSpc>
@@ -3841,7 +3841,7 @@
           <a:bodyPr rtlCol="0" anchor="ctr" wrap="square" lIns="365760"/>
           <a:lstStyle/>
           <a:p>
-            <a:pPr algn="l"/>
+            <a:pPr algn="just"/>
             <a:r>
               <a:rPr sz="1500" b="1">
                 <a:solidFill>
@@ -3875,7 +3875,7 @@
           </a:bodyPr>
           <a:lstStyle/>
           <a:p>
-            <a:pPr algn="l">
+            <a:pPr algn="just">
               <a:lnSpc>
                 <a:spcPct val="125000"/>
               </a:lnSpc>
@@ -3897,7 +3897,7 @@
             </a:r>
           </a:p>
           <a:p>
-            <a:pPr algn="l">
+            <a:pPr algn="just">
               <a:lnSpc>
                 <a:spcPct val="125000"/>
               </a:lnSpc>
@@ -3919,7 +3919,7 @@
             </a:r>
           </a:p>
           <a:p>
-            <a:pPr algn="l">
+            <a:pPr algn="just">
               <a:lnSpc>
                 <a:spcPct val="125000"/>
               </a:lnSpc>
@@ -3941,7 +3941,7 @@
             </a:r>
           </a:p>
           <a:p>
-            <a:pPr algn="l">
+            <a:pPr algn="just">
               <a:lnSpc>
                 <a:spcPct val="125000"/>
               </a:lnSpc>
@@ -3963,7 +3963,7 @@
             </a:r>
           </a:p>
           <a:p>
-            <a:pPr algn="l">
+            <a:pPr algn="just">
               <a:lnSpc>
                 <a:spcPct val="125000"/>
               </a:lnSpc>
@@ -3985,7 +3985,7 @@
             </a:r>
           </a:p>
           <a:p>
-            <a:pPr algn="l">
+            <a:pPr algn="just">
               <a:lnSpc>
                 <a:spcPct val="125000"/>
               </a:lnSpc>
@@ -4007,7 +4007,7 @@
             </a:r>
           </a:p>
           <a:p>
-            <a:pPr algn="l">
+            <a:pPr algn="just">
               <a:lnSpc>
                 <a:spcPct val="125000"/>
               </a:lnSpc>
@@ -4029,7 +4029,7 @@
             </a:r>
           </a:p>
           <a:p>
-            <a:pPr algn="l">
+            <a:pPr algn="just">
               <a:lnSpc>
                 <a:spcPct val="125000"/>
               </a:lnSpc>
@@ -4051,7 +4051,7 @@
             </a:r>
           </a:p>
           <a:p>
-            <a:pPr algn="l">
+            <a:pPr algn="just">
               <a:lnSpc>
                 <a:spcPct val="125000"/>
               </a:lnSpc>

--- a/ppts_output_v3/17_烟叶税风险指引.pptx
+++ b/ppts_output_v3/17_烟叶税风险指引.pptx
@@ -3297,7 +3297,7 @@
           <a:p>
             <a:pPr algn="just">
               <a:lnSpc>
-                <a:spcPct val="125000"/>
+                <a:spcPct val="110000"/>
               </a:lnSpc>
               <a:spcBef>
                 <a:spcPts val="0"/>
@@ -3319,7 +3319,7 @@
           <a:p>
             <a:pPr algn="just">
               <a:lnSpc>
-                <a:spcPct val="125000"/>
+                <a:spcPct val="110000"/>
               </a:lnSpc>
               <a:spcBef>
                 <a:spcPts val="0"/>
@@ -3341,7 +3341,7 @@
           <a:p>
             <a:pPr algn="just">
               <a:lnSpc>
-                <a:spcPct val="125000"/>
+                <a:spcPct val="110000"/>
               </a:lnSpc>
               <a:spcBef>
                 <a:spcPts val="0"/>
@@ -3363,7 +3363,7 @@
           <a:p>
             <a:pPr algn="just">
               <a:lnSpc>
-                <a:spcPct val="125000"/>
+                <a:spcPct val="110000"/>
               </a:lnSpc>
               <a:spcBef>
                 <a:spcPts val="0"/>
@@ -3385,7 +3385,7 @@
           <a:p>
             <a:pPr algn="just">
               <a:lnSpc>
-                <a:spcPct val="125000"/>
+                <a:spcPct val="110000"/>
               </a:lnSpc>
               <a:spcBef>
                 <a:spcPts val="0"/>
@@ -3407,7 +3407,7 @@
           <a:p>
             <a:pPr algn="just">
               <a:lnSpc>
-                <a:spcPct val="125000"/>
+                <a:spcPct val="110000"/>
               </a:lnSpc>
               <a:spcBef>
                 <a:spcPts val="0"/>
@@ -3429,7 +3429,7 @@
           <a:p>
             <a:pPr algn="just">
               <a:lnSpc>
-                <a:spcPct val="125000"/>
+                <a:spcPct val="110000"/>
               </a:lnSpc>
               <a:spcBef>
                 <a:spcPts val="0"/>
@@ -3451,7 +3451,7 @@
           <a:p>
             <a:pPr algn="just">
               <a:lnSpc>
-                <a:spcPct val="125000"/>
+                <a:spcPct val="110000"/>
               </a:lnSpc>
               <a:spcBef>
                 <a:spcPts val="0"/>
@@ -3473,7 +3473,7 @@
           <a:p>
             <a:pPr algn="just">
               <a:lnSpc>
-                <a:spcPct val="125000"/>
+                <a:spcPct val="110000"/>
               </a:lnSpc>
               <a:spcBef>
                 <a:spcPts val="0"/>
@@ -3587,7 +3587,7 @@
           <a:p>
             <a:pPr algn="just">
               <a:lnSpc>
-                <a:spcPct val="125000"/>
+                <a:spcPct val="110000"/>
               </a:lnSpc>
               <a:spcBef>
                 <a:spcPts val="0"/>
@@ -3609,7 +3609,7 @@
           <a:p>
             <a:pPr algn="just">
               <a:lnSpc>
-                <a:spcPct val="125000"/>
+                <a:spcPct val="110000"/>
               </a:lnSpc>
               <a:spcBef>
                 <a:spcPts val="0"/>
@@ -3631,7 +3631,7 @@
           <a:p>
             <a:pPr algn="just">
               <a:lnSpc>
-                <a:spcPct val="125000"/>
+                <a:spcPct val="110000"/>
               </a:lnSpc>
               <a:spcBef>
                 <a:spcPts val="0"/>
@@ -3653,7 +3653,7 @@
           <a:p>
             <a:pPr algn="just">
               <a:lnSpc>
-                <a:spcPct val="125000"/>
+                <a:spcPct val="110000"/>
               </a:lnSpc>
               <a:spcBef>
                 <a:spcPts val="0"/>
@@ -3675,7 +3675,7 @@
           <a:p>
             <a:pPr algn="just">
               <a:lnSpc>
-                <a:spcPct val="125000"/>
+                <a:spcPct val="110000"/>
               </a:lnSpc>
               <a:spcBef>
                 <a:spcPts val="0"/>
@@ -3697,7 +3697,7 @@
           <a:p>
             <a:pPr algn="just">
               <a:lnSpc>
-                <a:spcPct val="125000"/>
+                <a:spcPct val="110000"/>
               </a:lnSpc>
               <a:spcBef>
                 <a:spcPts val="0"/>
@@ -3719,7 +3719,7 @@
           <a:p>
             <a:pPr algn="just">
               <a:lnSpc>
-                <a:spcPct val="125000"/>
+                <a:spcPct val="110000"/>
               </a:lnSpc>
               <a:spcBef>
                 <a:spcPts val="0"/>
@@ -3741,7 +3741,7 @@
           <a:p>
             <a:pPr algn="just">
               <a:lnSpc>
-                <a:spcPct val="125000"/>
+                <a:spcPct val="110000"/>
               </a:lnSpc>
               <a:spcBef>
                 <a:spcPts val="0"/>
@@ -3763,7 +3763,7 @@
           <a:p>
             <a:pPr algn="just">
               <a:lnSpc>
-                <a:spcPct val="125000"/>
+                <a:spcPct val="110000"/>
               </a:lnSpc>
               <a:spcBef>
                 <a:spcPts val="0"/>
@@ -3877,7 +3877,7 @@
           <a:p>
             <a:pPr algn="just">
               <a:lnSpc>
-                <a:spcPct val="125000"/>
+                <a:spcPct val="110000"/>
               </a:lnSpc>
               <a:spcBef>
                 <a:spcPts val="0"/>
@@ -3899,7 +3899,7 @@
           <a:p>
             <a:pPr algn="just">
               <a:lnSpc>
-                <a:spcPct val="125000"/>
+                <a:spcPct val="110000"/>
               </a:lnSpc>
               <a:spcBef>
                 <a:spcPts val="0"/>
@@ -3921,7 +3921,7 @@
           <a:p>
             <a:pPr algn="just">
               <a:lnSpc>
-                <a:spcPct val="125000"/>
+                <a:spcPct val="110000"/>
               </a:lnSpc>
               <a:spcBef>
                 <a:spcPts val="0"/>
@@ -3943,7 +3943,7 @@
           <a:p>
             <a:pPr algn="just">
               <a:lnSpc>
-                <a:spcPct val="125000"/>
+                <a:spcPct val="110000"/>
               </a:lnSpc>
               <a:spcBef>
                 <a:spcPts val="0"/>
@@ -3965,7 +3965,7 @@
           <a:p>
             <a:pPr algn="just">
               <a:lnSpc>
-                <a:spcPct val="125000"/>
+                <a:spcPct val="110000"/>
               </a:lnSpc>
               <a:spcBef>
                 <a:spcPts val="0"/>
@@ -3987,7 +3987,7 @@
           <a:p>
             <a:pPr algn="just">
               <a:lnSpc>
-                <a:spcPct val="125000"/>
+                <a:spcPct val="110000"/>
               </a:lnSpc>
               <a:spcBef>
                 <a:spcPts val="0"/>
@@ -4009,7 +4009,7 @@
           <a:p>
             <a:pPr algn="just">
               <a:lnSpc>
-                <a:spcPct val="125000"/>
+                <a:spcPct val="110000"/>
               </a:lnSpc>
               <a:spcBef>
                 <a:spcPts val="0"/>
@@ -4031,7 +4031,7 @@
           <a:p>
             <a:pPr algn="just">
               <a:lnSpc>
-                <a:spcPct val="125000"/>
+                <a:spcPct val="110000"/>
               </a:lnSpc>
               <a:spcBef>
                 <a:spcPts val="0"/>
@@ -4053,7 +4053,7 @@
           <a:p>
             <a:pPr algn="just">
               <a:lnSpc>
-                <a:spcPct val="125000"/>
+                <a:spcPct val="110000"/>
               </a:lnSpc>
               <a:spcBef>
                 <a:spcPts val="0"/>

--- a/ppts_output_v3/17_烟叶税风险指引.pptx
+++ b/ppts_output_v3/17_烟叶税风险指引.pptx
@@ -3087,7 +3087,7 @@
     <p:bg>
       <p:bgPr>
         <a:solidFill>
-          <a:srgbClr val="1B3A5C"/>
+          <a:srgbClr val="0D5E5E"/>
         </a:solidFill>
         <a:effectLst/>
       </p:bgPr>
@@ -3101,143 +3101,20 @@
       <p:grpSpPr/>
       <p:sp>
         <p:nvSpPr>
-          <p:cNvPr id="2" name="TextBox 1"/>
-          <p:cNvSpPr txBox="1"/>
+          <p:cNvPr id="2" name="Oval 1"/>
+          <p:cNvSpPr/>
           <p:nvPr/>
         </p:nvSpPr>
         <p:spPr>
           <a:xfrm>
-            <a:off x="731520" y="1371600"/>
-            <a:ext cx="10728655" cy="2286000"/>
+            <a:off x="3353104" y="274320"/>
+            <a:ext cx="5486400" cy="5486400"/>
           </a:xfrm>
-          <a:prstGeom prst="rect">
-            <a:avLst/>
-          </a:prstGeom>
-          <a:noFill/>
-        </p:spPr>
-        <p:txBody>
-          <a:bodyPr wrap="square">
-            <a:spAutoFit/>
-          </a:bodyPr>
-          <a:lstStyle/>
-          <a:p>
-            <a:pPr algn="ctr">
-              <a:defRPr sz="4000" b="1">
-                <a:solidFill>
-                  <a:srgbClr val="FFFFFF"/>
-                </a:solidFill>
-              </a:defRPr>
-            </a:pPr>
-            <a:r>
-              <a:t>烟叶税风险指引</a:t>
-            </a:r>
-          </a:p>
-        </p:txBody>
-      </p:sp>
-      <p:sp>
-        <p:nvSpPr>
-          <p:cNvPr id="3" name="TextBox 2"/>
-          <p:cNvSpPr txBox="1"/>
-          <p:nvPr/>
-        </p:nvSpPr>
-        <p:spPr>
-          <a:xfrm>
-            <a:off x="731520" y="3840480"/>
-            <a:ext cx="10728655" cy="731520"/>
-          </a:xfrm>
-          <a:prstGeom prst="rect">
-            <a:avLst/>
-          </a:prstGeom>
-          <a:noFill/>
-        </p:spPr>
-        <p:txBody>
-          <a:bodyPr wrap="none">
-            <a:spAutoFit/>
-          </a:bodyPr>
-          <a:lstStyle/>
-          <a:p>
-            <a:pPr algn="ctr">
-              <a:defRPr sz="2200">
-                <a:solidFill>
-                  <a:srgbClr val="AABBCC"/>
-                </a:solidFill>
-              </a:defRPr>
-            </a:pPr>
-            <a:r>
-              <a:t>共 3 个风险点</a:t>
-            </a:r>
-          </a:p>
-        </p:txBody>
-      </p:sp>
-      <p:sp>
-        <p:nvSpPr>
-          <p:cNvPr id="4" name="TextBox 3"/>
-          <p:cNvSpPr txBox="1"/>
-          <p:nvPr/>
-        </p:nvSpPr>
-        <p:spPr>
-          <a:xfrm>
-            <a:off x="731520" y="4572000"/>
-            <a:ext cx="10728655" cy="731520"/>
-          </a:xfrm>
-          <a:prstGeom prst="rect">
-            <a:avLst/>
-          </a:prstGeom>
-          <a:noFill/>
-        </p:spPr>
-        <p:txBody>
-          <a:bodyPr wrap="none">
-            <a:spAutoFit/>
-          </a:bodyPr>
-          <a:lstStyle/>
-          <a:p>
-            <a:pPr algn="ctr">
-              <a:defRPr sz="1600">
-                <a:solidFill>
-                  <a:srgbClr val="8899AA"/>
-                </a:solidFill>
-              </a:defRPr>
-            </a:pPr>
-            <a:r>
-              <a:t>税费合规指引 (2.0版)</a:t>
-            </a:r>
-          </a:p>
-        </p:txBody>
-      </p:sp>
-    </p:spTree>
-  </p:cSld>
-  <p:clrMapOvr>
-    <a:masterClrMapping/>
-  </p:clrMapOvr>
-</p:sld>
-</file>
-
-<file path=ppt/slides/slide2.xml><?xml version="1.0" encoding="utf-8"?>
-<p:sld xmlns:a="http://schemas.openxmlformats.org/drawingml/2006/main" xmlns:p="http://schemas.openxmlformats.org/presentationml/2006/main" xmlns:r="http://schemas.openxmlformats.org/officeDocument/2006/relationships">
-  <p:cSld>
-    <p:spTree>
-      <p:nvGrpSpPr>
-        <p:cNvPr id="1" name=""/>
-        <p:cNvGrpSpPr/>
-        <p:nvPr/>
-      </p:nvGrpSpPr>
-      <p:grpSpPr/>
-      <p:sp>
-        <p:nvSpPr>
-          <p:cNvPr id="2" name="Rectangle 1"/>
-          <p:cNvSpPr/>
-          <p:nvPr/>
-        </p:nvSpPr>
-        <p:spPr>
-          <a:xfrm>
-            <a:off x="0" y="0"/>
-            <a:ext cx="12191695" cy="594360"/>
-          </a:xfrm>
-          <a:prstGeom prst="rect">
+          <a:prstGeom prst="ellipse">
             <a:avLst/>
           </a:prstGeom>
           <a:solidFill>
-            <a:srgbClr val="1B3A5C"/>
+            <a:srgbClr val="499A9A"/>
           </a:solidFill>
           <a:ln>
             <a:noFill/>
@@ -3258,18 +3135,10 @@
           </a:fontRef>
         </p:style>
         <p:txBody>
-          <a:bodyPr rtlCol="0" anchor="ctr" wrap="square" lIns="365760"/>
-          <a:lstStyle/>
-          <a:p>
-            <a:pPr algn="just"/>
-            <a:r>
-              <a:rPr sz="1500" b="1">
-                <a:solidFill>
-                  <a:srgbClr val="FFFFFF"/>
-                </a:solidFill>
-              </a:rPr>
-              <a:t>烟叶税风险指引  |  风险点 1</a:t>
-            </a:r>
+          <a:bodyPr rtlCol="0" anchor="ctr"/>
+          <a:lstStyle/>
+          <a:p>
+            <a:pPr algn="ctr"/>
           </a:p>
         </p:txBody>
       </p:sp>
@@ -3281,8 +3150,8 @@
         </p:nvSpPr>
         <p:spPr>
           <a:xfrm>
-            <a:off x="457200" y="777240"/>
-            <a:ext cx="11277295" cy="5852160"/>
+            <a:off x="731520" y="1645920"/>
+            <a:ext cx="10728655" cy="2286000"/>
           </a:xfrm>
           <a:prstGeom prst="rect">
             <a:avLst/>
@@ -3295,239 +3164,35 @@
           </a:bodyPr>
           <a:lstStyle/>
           <a:p>
-            <a:pPr algn="just">
-              <a:lnSpc>
-                <a:spcPct val="110000"/>
-              </a:lnSpc>
-              <a:spcBef>
-                <a:spcPts val="0"/>
-              </a:spcBef>
-              <a:spcAft>
-                <a:spcPts val="0"/>
-              </a:spcAft>
+            <a:pPr algn="ctr">
+              <a:defRPr sz="4000" b="1">
+                <a:solidFill>
+                  <a:srgbClr val="FFFFFF"/>
+                </a:solidFill>
+              </a:defRPr>
             </a:pPr>
             <a:r>
-              <a:rPr sz="1600" b="1">
-                <a:solidFill>
-                  <a:srgbClr val="1B3A5C"/>
-                </a:solidFill>
-                <a:latin typeface="Microsoft YaHei"/>
-              </a:rPr>
-              <a:t>烟叶税少计计税依据少缴税款风险</a:t>
-            </a:r>
-          </a:p>
-          <a:p>
-            <a:pPr algn="just">
-              <a:lnSpc>
-                <a:spcPct val="110000"/>
-              </a:lnSpc>
-              <a:spcBef>
-                <a:spcPts val="0"/>
-              </a:spcBef>
-              <a:spcAft>
-                <a:spcPts val="0"/>
-              </a:spcAft>
-            </a:pPr>
-            <a:r>
-              <a:rPr sz="1600" b="1">
-                <a:solidFill>
-                  <a:srgbClr val="333333"/>
-                </a:solidFill>
-                <a:latin typeface="Microsoft YaHei"/>
-              </a:rPr>
-              <a:t>【风险描述】</a:t>
-            </a:r>
-          </a:p>
-          <a:p>
-            <a:pPr algn="just">
-              <a:lnSpc>
-                <a:spcPct val="110000"/>
-              </a:lnSpc>
-              <a:spcBef>
-                <a:spcPts val="0"/>
-              </a:spcBef>
-              <a:spcAft>
-                <a:spcPts val="0"/>
-              </a:spcAft>
-            </a:pPr>
-            <a:r>
-              <a:rPr sz="1400" b="0">
-                <a:solidFill>
-                  <a:srgbClr val="000000"/>
-                </a:solidFill>
-                <a:latin typeface="Microsoft YaHei"/>
-              </a:rPr>
-              <a:t>企业申报的价款总额未包括价外补贴，或价外补贴未统一按烟叶收购价款的10%计算。</a:t>
-            </a:r>
-          </a:p>
-          <a:p>
-            <a:pPr algn="just">
-              <a:lnSpc>
-                <a:spcPct val="110000"/>
-              </a:lnSpc>
-              <a:spcBef>
-                <a:spcPts val="0"/>
-              </a:spcBef>
-              <a:spcAft>
-                <a:spcPts val="0"/>
-              </a:spcAft>
-            </a:pPr>
-            <a:r>
-              <a:rPr sz="1600" b="1">
-                <a:solidFill>
-                  <a:srgbClr val="1B5C9E"/>
-                </a:solidFill>
-                <a:latin typeface="Microsoft YaHei"/>
-              </a:rPr>
-              <a:t>【政策依据】</a:t>
-            </a:r>
-          </a:p>
-          <a:p>
-            <a:pPr algn="just">
-              <a:lnSpc>
-                <a:spcPct val="110000"/>
-              </a:lnSpc>
-              <a:spcBef>
-                <a:spcPts val="0"/>
-              </a:spcBef>
-              <a:spcAft>
-                <a:spcPts val="0"/>
-              </a:spcAft>
-            </a:pPr>
-            <a:r>
-              <a:rPr sz="1400" b="0">
-                <a:solidFill>
-                  <a:srgbClr val="000000"/>
-                </a:solidFill>
-                <a:latin typeface="Microsoft YaHei"/>
-              </a:rPr>
-              <a:t>根据《中华人民共和国烟叶税法》第三条的规定：烟叶税的计税依据为纳税人收购烟叶实际支付的价款总额。《财政部 税务总局关于明确烟叶税计税依据的通知》（财税〔2018〕75号）纳税人收购烟叶实际支付的价款总额包括纳税人支付给烟叶生产销售单位和个人的烟叶收购价款和价外补贴。其中，价外补贴统一按烟叶收购价款的10%计算。</a:t>
-            </a:r>
-          </a:p>
-          <a:p>
-            <a:pPr algn="just">
-              <a:lnSpc>
-                <a:spcPct val="110000"/>
-              </a:lnSpc>
-              <a:spcBef>
-                <a:spcPts val="0"/>
-              </a:spcBef>
-              <a:spcAft>
-                <a:spcPts val="0"/>
-              </a:spcAft>
-            </a:pPr>
-            <a:r>
-              <a:rPr sz="1600" b="1">
-                <a:solidFill>
-                  <a:srgbClr val="CC3333"/>
-                </a:solidFill>
-                <a:latin typeface="Microsoft YaHei"/>
-              </a:rPr>
-              <a:t>【预计风险】</a:t>
-            </a:r>
-          </a:p>
-          <a:p>
-            <a:pPr algn="just">
-              <a:lnSpc>
-                <a:spcPct val="110000"/>
-              </a:lnSpc>
-              <a:spcBef>
-                <a:spcPts val="0"/>
-              </a:spcBef>
-              <a:spcAft>
-                <a:spcPts val="0"/>
-              </a:spcAft>
-            </a:pPr>
-            <a:r>
-              <a:rPr sz="1400" b="0">
-                <a:solidFill>
-                  <a:srgbClr val="000000"/>
-                </a:solidFill>
-                <a:latin typeface="Microsoft YaHei"/>
-              </a:rPr>
-              <a:t>企业在申报烟叶税时，计税依据按照烟叶收购价款申报，未包含价外补贴，或者包含的价外补贴不是按照烟叶收购价款的10%计算的，将会造成烟叶税计税依据减少，产生少缴烟叶税的风险。</a:t>
-            </a:r>
-          </a:p>
-          <a:p>
-            <a:pPr algn="just">
-              <a:lnSpc>
-                <a:spcPct val="110000"/>
-              </a:lnSpc>
-              <a:spcBef>
-                <a:spcPts val="0"/>
-              </a:spcBef>
-              <a:spcAft>
-                <a:spcPts val="0"/>
-              </a:spcAft>
-            </a:pPr>
-            <a:r>
-              <a:rPr sz="1600" b="1">
-                <a:solidFill>
-                  <a:srgbClr val="008040"/>
-                </a:solidFill>
-                <a:latin typeface="Microsoft YaHei"/>
-              </a:rPr>
-              <a:t>【解决方法】</a:t>
-            </a:r>
-          </a:p>
-          <a:p>
-            <a:pPr algn="just">
-              <a:lnSpc>
-                <a:spcPct val="110000"/>
-              </a:lnSpc>
-              <a:spcBef>
-                <a:spcPts val="0"/>
-              </a:spcBef>
-              <a:spcAft>
-                <a:spcPts val="0"/>
-              </a:spcAft>
-            </a:pPr>
-            <a:r>
-              <a:rPr sz="1400" b="0">
-                <a:solidFill>
-                  <a:srgbClr val="000000"/>
-                </a:solidFill>
-                <a:latin typeface="Microsoft YaHei"/>
-              </a:rPr>
-              <a:t>企业申报烟叶税时，无论实际支付的价外费用是多少，都应按支付价款的10%核算价外费用，并将价款及价外费用共同申报为烟叶税计税依据。</a:t>
-            </a:r>
-          </a:p>
-        </p:txBody>
-      </p:sp>
-    </p:spTree>
-  </p:cSld>
-  <p:clrMapOvr>
-    <a:masterClrMapping/>
-  </p:clrMapOvr>
-</p:sld>
-</file>
-
-<file path=ppt/slides/slide3.xml><?xml version="1.0" encoding="utf-8"?>
-<p:sld xmlns:a="http://schemas.openxmlformats.org/drawingml/2006/main" xmlns:p="http://schemas.openxmlformats.org/presentationml/2006/main" xmlns:r="http://schemas.openxmlformats.org/officeDocument/2006/relationships">
-  <p:cSld>
-    <p:spTree>
-      <p:nvGrpSpPr>
-        <p:cNvPr id="1" name=""/>
-        <p:cNvGrpSpPr/>
-        <p:nvPr/>
-      </p:nvGrpSpPr>
-      <p:grpSpPr/>
-      <p:sp>
-        <p:nvSpPr>
-          <p:cNvPr id="2" name="Rectangle 1"/>
+              <a:t>烟叶税风险指引</a:t>
+            </a:r>
+          </a:p>
+        </p:txBody>
+      </p:sp>
+      <p:sp>
+        <p:nvSpPr>
+          <p:cNvPr id="4" name="Rectangle 3"/>
           <p:cNvSpPr/>
           <p:nvPr/>
         </p:nvSpPr>
         <p:spPr>
           <a:xfrm>
-            <a:off x="0" y="0"/>
-            <a:ext cx="12191695" cy="594360"/>
+            <a:off x="4114800" y="3749039"/>
+            <a:ext cx="3962095" cy="18288"/>
           </a:xfrm>
           <a:prstGeom prst="rect">
             <a:avLst/>
           </a:prstGeom>
           <a:solidFill>
-            <a:srgbClr val="1B3A5C"/>
+            <a:srgbClr val="FFFFFF"/>
           </a:solidFill>
           <a:ln>
             <a:noFill/>
@@ -3548,31 +3213,23 @@
           </a:fontRef>
         </p:style>
         <p:txBody>
-          <a:bodyPr rtlCol="0" anchor="ctr" wrap="square" lIns="365760"/>
-          <a:lstStyle/>
-          <a:p>
-            <a:pPr algn="just"/>
-            <a:r>
-              <a:rPr sz="1500" b="1">
-                <a:solidFill>
-                  <a:srgbClr val="FFFFFF"/>
-                </a:solidFill>
-              </a:rPr>
-              <a:t>烟叶税风险指引  |  风险点 2</a:t>
-            </a:r>
-          </a:p>
-        </p:txBody>
-      </p:sp>
-      <p:sp>
-        <p:nvSpPr>
-          <p:cNvPr id="3" name="TextBox 2"/>
+          <a:bodyPr rtlCol="0" anchor="ctr"/>
+          <a:lstStyle/>
+          <a:p>
+            <a:pPr algn="ctr"/>
+          </a:p>
+        </p:txBody>
+      </p:sp>
+      <p:sp>
+        <p:nvSpPr>
+          <p:cNvPr id="5" name="TextBox 4"/>
           <p:cNvSpPr txBox="1"/>
           <p:nvPr/>
         </p:nvSpPr>
         <p:spPr>
           <a:xfrm>
-            <a:off x="457200" y="777240"/>
-            <a:ext cx="11277295" cy="5852160"/>
+            <a:off x="731520" y="3931920"/>
+            <a:ext cx="10728655" cy="548640"/>
           </a:xfrm>
           <a:prstGeom prst="rect">
             <a:avLst/>
@@ -3580,206 +3237,55 @@
           <a:noFill/>
         </p:spPr>
         <p:txBody>
-          <a:bodyPr wrap="square">
+          <a:bodyPr wrap="none">
             <a:spAutoFit/>
           </a:bodyPr>
           <a:lstStyle/>
           <a:p>
-            <a:pPr algn="just">
-              <a:lnSpc>
-                <a:spcPct val="110000"/>
-              </a:lnSpc>
-              <a:spcBef>
-                <a:spcPts val="0"/>
-              </a:spcBef>
-              <a:spcAft>
-                <a:spcPts val="0"/>
-              </a:spcAft>
+            <a:pPr algn="ctr">
+              <a:defRPr sz="2200">
+                <a:solidFill>
+                  <a:srgbClr val="CCCCCC"/>
+                </a:solidFill>
+              </a:defRPr>
             </a:pPr>
             <a:r>
-              <a:rPr sz="1600" b="1">
-                <a:solidFill>
-                  <a:srgbClr val="1B3A5C"/>
-                </a:solidFill>
-                <a:latin typeface="Microsoft YaHei"/>
-              </a:rPr>
-              <a:t>烟叶税纳税义务发生时间确认错误风险</a:t>
-            </a:r>
-          </a:p>
-          <a:p>
-            <a:pPr algn="just">
-              <a:lnSpc>
-                <a:spcPct val="110000"/>
-              </a:lnSpc>
-              <a:spcBef>
-                <a:spcPts val="0"/>
-              </a:spcBef>
-              <a:spcAft>
-                <a:spcPts val="0"/>
-              </a:spcAft>
+              <a:t>共 3 个风险点</a:t>
+            </a:r>
+          </a:p>
+        </p:txBody>
+      </p:sp>
+      <p:sp>
+        <p:nvSpPr>
+          <p:cNvPr id="6" name="TextBox 5"/>
+          <p:cNvSpPr txBox="1"/>
+          <p:nvPr/>
+        </p:nvSpPr>
+        <p:spPr>
+          <a:xfrm>
+            <a:off x="731520" y="4572000"/>
+            <a:ext cx="10728655" cy="731520"/>
+          </a:xfrm>
+          <a:prstGeom prst="rect">
+            <a:avLst/>
+          </a:prstGeom>
+          <a:noFill/>
+        </p:spPr>
+        <p:txBody>
+          <a:bodyPr wrap="none">
+            <a:spAutoFit/>
+          </a:bodyPr>
+          <a:lstStyle/>
+          <a:p>
+            <a:pPr algn="ctr">
+              <a:defRPr sz="1600">
+                <a:solidFill>
+                  <a:srgbClr val="AABBCC"/>
+                </a:solidFill>
+              </a:defRPr>
             </a:pPr>
             <a:r>
-              <a:rPr sz="1600" b="1">
-                <a:solidFill>
-                  <a:srgbClr val="333333"/>
-                </a:solidFill>
-                <a:latin typeface="Microsoft YaHei"/>
-              </a:rPr>
-              <a:t>【风险描述】</a:t>
-            </a:r>
-          </a:p>
-          <a:p>
-            <a:pPr algn="just">
-              <a:lnSpc>
-                <a:spcPct val="110000"/>
-              </a:lnSpc>
-              <a:spcBef>
-                <a:spcPts val="0"/>
-              </a:spcBef>
-              <a:spcAft>
-                <a:spcPts val="0"/>
-              </a:spcAft>
-            </a:pPr>
-            <a:r>
-              <a:rPr sz="1400" b="0">
-                <a:solidFill>
-                  <a:srgbClr val="000000"/>
-                </a:solidFill>
-                <a:latin typeface="Microsoft YaHei"/>
-              </a:rPr>
-              <a:t>未按规定以纳税人收购烟叶的当日确认纳税义务发生时间。</a:t>
-            </a:r>
-          </a:p>
-          <a:p>
-            <a:pPr algn="just">
-              <a:lnSpc>
-                <a:spcPct val="110000"/>
-              </a:lnSpc>
-              <a:spcBef>
-                <a:spcPts val="0"/>
-              </a:spcBef>
-              <a:spcAft>
-                <a:spcPts val="0"/>
-              </a:spcAft>
-            </a:pPr>
-            <a:r>
-              <a:rPr sz="1600" b="1">
-                <a:solidFill>
-                  <a:srgbClr val="1B5C9E"/>
-                </a:solidFill>
-                <a:latin typeface="Microsoft YaHei"/>
-              </a:rPr>
-              <a:t>【政策依据】</a:t>
-            </a:r>
-          </a:p>
-          <a:p>
-            <a:pPr algn="just">
-              <a:lnSpc>
-                <a:spcPct val="110000"/>
-              </a:lnSpc>
-              <a:spcBef>
-                <a:spcPts val="0"/>
-              </a:spcBef>
-              <a:spcAft>
-                <a:spcPts val="0"/>
-              </a:spcAft>
-            </a:pPr>
-            <a:r>
-              <a:rPr sz="1400" b="0">
-                <a:solidFill>
-                  <a:srgbClr val="000000"/>
-                </a:solidFill>
-                <a:latin typeface="Microsoft YaHei"/>
-              </a:rPr>
-              <a:t>根据《中华人民共和国烟叶税法》的规定：第八条 烟叶税的纳税义务发生时间为纳税人收购烟叶的当日。第九条 烟叶税按月计征，纳税人应当于纳税义务发生月终了之日起十五日内申报并缴纳税款。</a:t>
-            </a:r>
-          </a:p>
-          <a:p>
-            <a:pPr algn="just">
-              <a:lnSpc>
-                <a:spcPct val="110000"/>
-              </a:lnSpc>
-              <a:spcBef>
-                <a:spcPts val="0"/>
-              </a:spcBef>
-              <a:spcAft>
-                <a:spcPts val="0"/>
-              </a:spcAft>
-            </a:pPr>
-            <a:r>
-              <a:rPr sz="1600" b="1">
-                <a:solidFill>
-                  <a:srgbClr val="CC3333"/>
-                </a:solidFill>
-                <a:latin typeface="Microsoft YaHei"/>
-              </a:rPr>
-              <a:t>【预计风险】</a:t>
-            </a:r>
-          </a:p>
-          <a:p>
-            <a:pPr algn="just">
-              <a:lnSpc>
-                <a:spcPct val="110000"/>
-              </a:lnSpc>
-              <a:spcBef>
-                <a:spcPts val="0"/>
-              </a:spcBef>
-              <a:spcAft>
-                <a:spcPts val="0"/>
-              </a:spcAft>
-            </a:pPr>
-            <a:r>
-              <a:rPr sz="1400" b="0">
-                <a:solidFill>
-                  <a:srgbClr val="000000"/>
-                </a:solidFill>
-                <a:latin typeface="Microsoft YaHei"/>
-              </a:rPr>
-              <a:t>企业未按收购烟叶的当日确认纳税义务发生时间，而出现延期缴纳税款的情况。</a:t>
-            </a:r>
-          </a:p>
-          <a:p>
-            <a:pPr algn="just">
-              <a:lnSpc>
-                <a:spcPct val="110000"/>
-              </a:lnSpc>
-              <a:spcBef>
-                <a:spcPts val="0"/>
-              </a:spcBef>
-              <a:spcAft>
-                <a:spcPts val="0"/>
-              </a:spcAft>
-            </a:pPr>
-            <a:r>
-              <a:rPr sz="1600" b="1">
-                <a:solidFill>
-                  <a:srgbClr val="008040"/>
-                </a:solidFill>
-                <a:latin typeface="Microsoft YaHei"/>
-              </a:rPr>
-              <a:t>【解决方法】</a:t>
-            </a:r>
-          </a:p>
-          <a:p>
-            <a:pPr algn="just">
-              <a:lnSpc>
-                <a:spcPct val="110000"/>
-              </a:lnSpc>
-              <a:spcBef>
-                <a:spcPts val="0"/>
-              </a:spcBef>
-              <a:spcAft>
-                <a:spcPts val="0"/>
-              </a:spcAft>
-            </a:pPr>
-            <a:r>
-              <a:rPr sz="1400" b="0">
-                <a:solidFill>
-                  <a:srgbClr val="000000"/>
-                </a:solidFill>
-                <a:latin typeface="Microsoft YaHei"/>
-              </a:rPr>
-              <a:t>企业应按实际收购烟叶时间入账核算，并按规定期限申报缴纳烟叶税。</a:t>
+              <a:t>税费合规指引 (2.0版)</a:t>
             </a:r>
           </a:p>
         </p:txBody>
@@ -3792,7 +3298,7 @@
 </p:sld>
 </file>
 
-<file path=ppt/slides/slide4.xml><?xml version="1.0" encoding="utf-8"?>
+<file path=ppt/slides/slide2.xml><?xml version="1.0" encoding="utf-8"?>
 <p:sld xmlns:a="http://schemas.openxmlformats.org/drawingml/2006/main" xmlns:p="http://schemas.openxmlformats.org/presentationml/2006/main" xmlns:r="http://schemas.openxmlformats.org/officeDocument/2006/relationships">
   <p:cSld>
     <p:spTree>
@@ -3817,7 +3323,7 @@
             <a:avLst/>
           </a:prstGeom>
           <a:solidFill>
-            <a:srgbClr val="1B3A5C"/>
+            <a:srgbClr val="0D5E5E"/>
           </a:solidFill>
           <a:ln>
             <a:noFill/>
@@ -3848,7 +3354,7 @@
                   <a:srgbClr val="FFFFFF"/>
                 </a:solidFill>
               </a:rPr>
-              <a:t>烟叶税风险指引  |  风险点 3</a:t>
+              <a:t>烟叶税风险指引  |  风险点 1</a:t>
             </a:r>
           </a:p>
         </p:txBody>
@@ -3889,11 +3395,11 @@
             <a:r>
               <a:rPr sz="1600" b="1">
                 <a:solidFill>
-                  <a:srgbClr val="1B3A5C"/>
+                  <a:srgbClr val="0D5E5E"/>
                 </a:solidFill>
                 <a:latin typeface="Microsoft YaHei"/>
               </a:rPr>
-              <a:t>烟叶税纳税地点适用错误风险</a:t>
+              <a:t>烟叶税少计计税依据少缴税款风险</a:t>
             </a:r>
           </a:p>
           <a:p>
@@ -3937,7 +3443,7 @@
                 </a:solidFill>
                 <a:latin typeface="Microsoft YaHei"/>
               </a:rPr>
-              <a:t>企业未按照规定向烟叶收购地税务机关申报缴纳烟叶税。</a:t>
+              <a:t>企业申报的价款总额未包括价外补贴，或价外补贴未统一按烟叶收购价款的10%计算。</a:t>
             </a:r>
           </a:p>
           <a:p>
@@ -3981,7 +3487,7 @@
                 </a:solidFill>
                 <a:latin typeface="Microsoft YaHei"/>
               </a:rPr>
-              <a:t>根据《中华人民共和国烟叶税法》第七条的规定：纳税人应当向烟叶收购地的主管税务机关申报缴纳烟叶税。</a:t>
+              <a:t>根据《中华人民共和国烟叶税法》第三条的规定：烟叶税的计税依据为纳税人收购烟叶实际支付的价款总额。《财政部 税务总局关于明确烟叶税计税依据的通知》（财税〔2018〕75号）纳税人收购烟叶实际支付的价款总额包括纳税人支付给烟叶生产销售单位和个人的烟叶收购价款和价外补贴。其中，价外补贴统一按烟叶收购价款的10%计算。</a:t>
             </a:r>
           </a:p>
           <a:p>
@@ -4025,7 +3531,7 @@
                 </a:solidFill>
                 <a:latin typeface="Microsoft YaHei"/>
               </a:rPr>
-              <a:t>企业向机构所在地或其他非收购地税务机关申报缴纳烟叶税，导致烟叶税纳税地点错误，造成税款划转的风险。</a:t>
+              <a:t>企业在申报烟叶税时，计税依据按照烟叶收购价款申报，未包含价外补贴，或者包含的价外补贴不是按照烟叶收购价款的10%计算的，将会造成烟叶税计税依据减少，产生少缴烟叶税的风险。</a:t>
             </a:r>
           </a:p>
           <a:p>
@@ -4069,8 +3575,717 @@
                 </a:solidFill>
                 <a:latin typeface="Microsoft YaHei"/>
               </a:rPr>
+              <a:t>企业申报烟叶税时，无论实际支付的价外费用是多少，都应按支付价款的10%核算价外费用，并将价款及价外费用共同申报为烟叶税计税依据。</a:t>
+            </a:r>
+          </a:p>
+        </p:txBody>
+      </p:sp>
+      <p:sp>
+        <p:nvSpPr>
+          <p:cNvPr id="4" name="Rectangle 3"/>
+          <p:cNvSpPr/>
+          <p:nvPr/>
+        </p:nvSpPr>
+        <p:spPr>
+          <a:xfrm>
+            <a:off x="457200" y="6720840"/>
+            <a:ext cx="11277295" cy="27432"/>
+          </a:xfrm>
+          <a:prstGeom prst="rect">
+            <a:avLst/>
+          </a:prstGeom>
+          <a:solidFill>
+            <a:srgbClr val="0D5E5E"/>
+          </a:solidFill>
+          <a:ln>
+            <a:noFill/>
+          </a:ln>
+        </p:spPr>
+        <p:style>
+          <a:lnRef idx="1">
+            <a:schemeClr val="accent1"/>
+          </a:lnRef>
+          <a:fillRef idx="3">
+            <a:schemeClr val="accent1"/>
+          </a:fillRef>
+          <a:effectRef idx="2">
+            <a:schemeClr val="accent1"/>
+          </a:effectRef>
+          <a:fontRef idx="minor">
+            <a:schemeClr val="lt1"/>
+          </a:fontRef>
+        </p:style>
+        <p:txBody>
+          <a:bodyPr rtlCol="0" anchor="ctr"/>
+          <a:lstStyle/>
+          <a:p>
+            <a:pPr algn="ctr"/>
+          </a:p>
+        </p:txBody>
+      </p:sp>
+    </p:spTree>
+  </p:cSld>
+  <p:clrMapOvr>
+    <a:masterClrMapping/>
+  </p:clrMapOvr>
+</p:sld>
+</file>
+
+<file path=ppt/slides/slide3.xml><?xml version="1.0" encoding="utf-8"?>
+<p:sld xmlns:a="http://schemas.openxmlformats.org/drawingml/2006/main" xmlns:p="http://schemas.openxmlformats.org/presentationml/2006/main" xmlns:r="http://schemas.openxmlformats.org/officeDocument/2006/relationships">
+  <p:cSld>
+    <p:spTree>
+      <p:nvGrpSpPr>
+        <p:cNvPr id="1" name=""/>
+        <p:cNvGrpSpPr/>
+        <p:nvPr/>
+      </p:nvGrpSpPr>
+      <p:grpSpPr/>
+      <p:sp>
+        <p:nvSpPr>
+          <p:cNvPr id="2" name="Rectangle 1"/>
+          <p:cNvSpPr/>
+          <p:nvPr/>
+        </p:nvSpPr>
+        <p:spPr>
+          <a:xfrm>
+            <a:off x="0" y="0"/>
+            <a:ext cx="12191695" cy="594360"/>
+          </a:xfrm>
+          <a:prstGeom prst="rect">
+            <a:avLst/>
+          </a:prstGeom>
+          <a:solidFill>
+            <a:srgbClr val="0D5E5E"/>
+          </a:solidFill>
+          <a:ln>
+            <a:noFill/>
+          </a:ln>
+        </p:spPr>
+        <p:style>
+          <a:lnRef idx="1">
+            <a:schemeClr val="accent1"/>
+          </a:lnRef>
+          <a:fillRef idx="3">
+            <a:schemeClr val="accent1"/>
+          </a:fillRef>
+          <a:effectRef idx="2">
+            <a:schemeClr val="accent1"/>
+          </a:effectRef>
+          <a:fontRef idx="minor">
+            <a:schemeClr val="lt1"/>
+          </a:fontRef>
+        </p:style>
+        <p:txBody>
+          <a:bodyPr rtlCol="0" anchor="ctr" wrap="square" lIns="365760"/>
+          <a:lstStyle/>
+          <a:p>
+            <a:pPr algn="just"/>
+            <a:r>
+              <a:rPr sz="1500" b="1">
+                <a:solidFill>
+                  <a:srgbClr val="FFFFFF"/>
+                </a:solidFill>
+              </a:rPr>
+              <a:t>烟叶税风险指引  |  风险点 2</a:t>
+            </a:r>
+          </a:p>
+        </p:txBody>
+      </p:sp>
+      <p:sp>
+        <p:nvSpPr>
+          <p:cNvPr id="3" name="TextBox 2"/>
+          <p:cNvSpPr txBox="1"/>
+          <p:nvPr/>
+        </p:nvSpPr>
+        <p:spPr>
+          <a:xfrm>
+            <a:off x="457200" y="777240"/>
+            <a:ext cx="11277295" cy="5852160"/>
+          </a:xfrm>
+          <a:prstGeom prst="rect">
+            <a:avLst/>
+          </a:prstGeom>
+          <a:noFill/>
+        </p:spPr>
+        <p:txBody>
+          <a:bodyPr wrap="square">
+            <a:spAutoFit/>
+          </a:bodyPr>
+          <a:lstStyle/>
+          <a:p>
+            <a:pPr algn="just">
+              <a:lnSpc>
+                <a:spcPct val="110000"/>
+              </a:lnSpc>
+              <a:spcBef>
+                <a:spcPts val="0"/>
+              </a:spcBef>
+              <a:spcAft>
+                <a:spcPts val="0"/>
+              </a:spcAft>
+            </a:pPr>
+            <a:r>
+              <a:rPr sz="1600" b="1">
+                <a:solidFill>
+                  <a:srgbClr val="0D5E5E"/>
+                </a:solidFill>
+                <a:latin typeface="Microsoft YaHei"/>
+              </a:rPr>
+              <a:t>烟叶税纳税义务发生时间确认错误风险</a:t>
+            </a:r>
+          </a:p>
+          <a:p>
+            <a:pPr algn="just">
+              <a:lnSpc>
+                <a:spcPct val="110000"/>
+              </a:lnSpc>
+              <a:spcBef>
+                <a:spcPts val="0"/>
+              </a:spcBef>
+              <a:spcAft>
+                <a:spcPts val="0"/>
+              </a:spcAft>
+            </a:pPr>
+            <a:r>
+              <a:rPr sz="1600" b="1">
+                <a:solidFill>
+                  <a:srgbClr val="333333"/>
+                </a:solidFill>
+                <a:latin typeface="Microsoft YaHei"/>
+              </a:rPr>
+              <a:t>【风险描述】</a:t>
+            </a:r>
+          </a:p>
+          <a:p>
+            <a:pPr algn="just">
+              <a:lnSpc>
+                <a:spcPct val="110000"/>
+              </a:lnSpc>
+              <a:spcBef>
+                <a:spcPts val="0"/>
+              </a:spcBef>
+              <a:spcAft>
+                <a:spcPts val="0"/>
+              </a:spcAft>
+            </a:pPr>
+            <a:r>
+              <a:rPr sz="1400" b="0">
+                <a:solidFill>
+                  <a:srgbClr val="000000"/>
+                </a:solidFill>
+                <a:latin typeface="Microsoft YaHei"/>
+              </a:rPr>
+              <a:t>未按规定以纳税人收购烟叶的当日确认纳税义务发生时间。</a:t>
+            </a:r>
+          </a:p>
+          <a:p>
+            <a:pPr algn="just">
+              <a:lnSpc>
+                <a:spcPct val="110000"/>
+              </a:lnSpc>
+              <a:spcBef>
+                <a:spcPts val="0"/>
+              </a:spcBef>
+              <a:spcAft>
+                <a:spcPts val="0"/>
+              </a:spcAft>
+            </a:pPr>
+            <a:r>
+              <a:rPr sz="1600" b="1">
+                <a:solidFill>
+                  <a:srgbClr val="1B5C9E"/>
+                </a:solidFill>
+                <a:latin typeface="Microsoft YaHei"/>
+              </a:rPr>
+              <a:t>【政策依据】</a:t>
+            </a:r>
+          </a:p>
+          <a:p>
+            <a:pPr algn="just">
+              <a:lnSpc>
+                <a:spcPct val="110000"/>
+              </a:lnSpc>
+              <a:spcBef>
+                <a:spcPts val="0"/>
+              </a:spcBef>
+              <a:spcAft>
+                <a:spcPts val="0"/>
+              </a:spcAft>
+            </a:pPr>
+            <a:r>
+              <a:rPr sz="1400" b="0">
+                <a:solidFill>
+                  <a:srgbClr val="000000"/>
+                </a:solidFill>
+                <a:latin typeface="Microsoft YaHei"/>
+              </a:rPr>
+              <a:t>根据《中华人民共和国烟叶税法》的规定：第八条 烟叶税的纳税义务发生时间为纳税人收购烟叶的当日。第九条 烟叶税按月计征，纳税人应当于纳税义务发生月终了之日起十五日内申报并缴纳税款。</a:t>
+            </a:r>
+          </a:p>
+          <a:p>
+            <a:pPr algn="just">
+              <a:lnSpc>
+                <a:spcPct val="110000"/>
+              </a:lnSpc>
+              <a:spcBef>
+                <a:spcPts val="0"/>
+              </a:spcBef>
+              <a:spcAft>
+                <a:spcPts val="0"/>
+              </a:spcAft>
+            </a:pPr>
+            <a:r>
+              <a:rPr sz="1600" b="1">
+                <a:solidFill>
+                  <a:srgbClr val="CC3333"/>
+                </a:solidFill>
+                <a:latin typeface="Microsoft YaHei"/>
+              </a:rPr>
+              <a:t>【预计风险】</a:t>
+            </a:r>
+          </a:p>
+          <a:p>
+            <a:pPr algn="just">
+              <a:lnSpc>
+                <a:spcPct val="110000"/>
+              </a:lnSpc>
+              <a:spcBef>
+                <a:spcPts val="0"/>
+              </a:spcBef>
+              <a:spcAft>
+                <a:spcPts val="0"/>
+              </a:spcAft>
+            </a:pPr>
+            <a:r>
+              <a:rPr sz="1400" b="0">
+                <a:solidFill>
+                  <a:srgbClr val="000000"/>
+                </a:solidFill>
+                <a:latin typeface="Microsoft YaHei"/>
+              </a:rPr>
+              <a:t>企业未按收购烟叶的当日确认纳税义务发生时间，而出现延期缴纳税款的情况。</a:t>
+            </a:r>
+          </a:p>
+          <a:p>
+            <a:pPr algn="just">
+              <a:lnSpc>
+                <a:spcPct val="110000"/>
+              </a:lnSpc>
+              <a:spcBef>
+                <a:spcPts val="0"/>
+              </a:spcBef>
+              <a:spcAft>
+                <a:spcPts val="0"/>
+              </a:spcAft>
+            </a:pPr>
+            <a:r>
+              <a:rPr sz="1600" b="1">
+                <a:solidFill>
+                  <a:srgbClr val="008040"/>
+                </a:solidFill>
+                <a:latin typeface="Microsoft YaHei"/>
+              </a:rPr>
+              <a:t>【解决方法】</a:t>
+            </a:r>
+          </a:p>
+          <a:p>
+            <a:pPr algn="just">
+              <a:lnSpc>
+                <a:spcPct val="110000"/>
+              </a:lnSpc>
+              <a:spcBef>
+                <a:spcPts val="0"/>
+              </a:spcBef>
+              <a:spcAft>
+                <a:spcPts val="0"/>
+              </a:spcAft>
+            </a:pPr>
+            <a:r>
+              <a:rPr sz="1400" b="0">
+                <a:solidFill>
+                  <a:srgbClr val="000000"/>
+                </a:solidFill>
+                <a:latin typeface="Microsoft YaHei"/>
+              </a:rPr>
+              <a:t>企业应按实际收购烟叶时间入账核算，并按规定期限申报缴纳烟叶税。</a:t>
+            </a:r>
+          </a:p>
+        </p:txBody>
+      </p:sp>
+      <p:sp>
+        <p:nvSpPr>
+          <p:cNvPr id="4" name="Rectangle 3"/>
+          <p:cNvSpPr/>
+          <p:nvPr/>
+        </p:nvSpPr>
+        <p:spPr>
+          <a:xfrm>
+            <a:off x="457200" y="6720840"/>
+            <a:ext cx="11277295" cy="27432"/>
+          </a:xfrm>
+          <a:prstGeom prst="rect">
+            <a:avLst/>
+          </a:prstGeom>
+          <a:solidFill>
+            <a:srgbClr val="0D5E5E"/>
+          </a:solidFill>
+          <a:ln>
+            <a:noFill/>
+          </a:ln>
+        </p:spPr>
+        <p:style>
+          <a:lnRef idx="1">
+            <a:schemeClr val="accent1"/>
+          </a:lnRef>
+          <a:fillRef idx="3">
+            <a:schemeClr val="accent1"/>
+          </a:fillRef>
+          <a:effectRef idx="2">
+            <a:schemeClr val="accent1"/>
+          </a:effectRef>
+          <a:fontRef idx="minor">
+            <a:schemeClr val="lt1"/>
+          </a:fontRef>
+        </p:style>
+        <p:txBody>
+          <a:bodyPr rtlCol="0" anchor="ctr"/>
+          <a:lstStyle/>
+          <a:p>
+            <a:pPr algn="ctr"/>
+          </a:p>
+        </p:txBody>
+      </p:sp>
+    </p:spTree>
+  </p:cSld>
+  <p:clrMapOvr>
+    <a:masterClrMapping/>
+  </p:clrMapOvr>
+</p:sld>
+</file>
+
+<file path=ppt/slides/slide4.xml><?xml version="1.0" encoding="utf-8"?>
+<p:sld xmlns:a="http://schemas.openxmlformats.org/drawingml/2006/main" xmlns:p="http://schemas.openxmlformats.org/presentationml/2006/main" xmlns:r="http://schemas.openxmlformats.org/officeDocument/2006/relationships">
+  <p:cSld>
+    <p:spTree>
+      <p:nvGrpSpPr>
+        <p:cNvPr id="1" name=""/>
+        <p:cNvGrpSpPr/>
+        <p:nvPr/>
+      </p:nvGrpSpPr>
+      <p:grpSpPr/>
+      <p:sp>
+        <p:nvSpPr>
+          <p:cNvPr id="2" name="Rectangle 1"/>
+          <p:cNvSpPr/>
+          <p:nvPr/>
+        </p:nvSpPr>
+        <p:spPr>
+          <a:xfrm>
+            <a:off x="0" y="0"/>
+            <a:ext cx="12191695" cy="594360"/>
+          </a:xfrm>
+          <a:prstGeom prst="rect">
+            <a:avLst/>
+          </a:prstGeom>
+          <a:solidFill>
+            <a:srgbClr val="0D5E5E"/>
+          </a:solidFill>
+          <a:ln>
+            <a:noFill/>
+          </a:ln>
+        </p:spPr>
+        <p:style>
+          <a:lnRef idx="1">
+            <a:schemeClr val="accent1"/>
+          </a:lnRef>
+          <a:fillRef idx="3">
+            <a:schemeClr val="accent1"/>
+          </a:fillRef>
+          <a:effectRef idx="2">
+            <a:schemeClr val="accent1"/>
+          </a:effectRef>
+          <a:fontRef idx="minor">
+            <a:schemeClr val="lt1"/>
+          </a:fontRef>
+        </p:style>
+        <p:txBody>
+          <a:bodyPr rtlCol="0" anchor="ctr" wrap="square" lIns="365760"/>
+          <a:lstStyle/>
+          <a:p>
+            <a:pPr algn="just"/>
+            <a:r>
+              <a:rPr sz="1500" b="1">
+                <a:solidFill>
+                  <a:srgbClr val="FFFFFF"/>
+                </a:solidFill>
+              </a:rPr>
+              <a:t>烟叶税风险指引  |  风险点 3</a:t>
+            </a:r>
+          </a:p>
+        </p:txBody>
+      </p:sp>
+      <p:sp>
+        <p:nvSpPr>
+          <p:cNvPr id="3" name="TextBox 2"/>
+          <p:cNvSpPr txBox="1"/>
+          <p:nvPr/>
+        </p:nvSpPr>
+        <p:spPr>
+          <a:xfrm>
+            <a:off x="457200" y="777240"/>
+            <a:ext cx="11277295" cy="5852160"/>
+          </a:xfrm>
+          <a:prstGeom prst="rect">
+            <a:avLst/>
+          </a:prstGeom>
+          <a:noFill/>
+        </p:spPr>
+        <p:txBody>
+          <a:bodyPr wrap="square">
+            <a:spAutoFit/>
+          </a:bodyPr>
+          <a:lstStyle/>
+          <a:p>
+            <a:pPr algn="just">
+              <a:lnSpc>
+                <a:spcPct val="110000"/>
+              </a:lnSpc>
+              <a:spcBef>
+                <a:spcPts val="0"/>
+              </a:spcBef>
+              <a:spcAft>
+                <a:spcPts val="0"/>
+              </a:spcAft>
+            </a:pPr>
+            <a:r>
+              <a:rPr sz="1600" b="1">
+                <a:solidFill>
+                  <a:srgbClr val="0D5E5E"/>
+                </a:solidFill>
+                <a:latin typeface="Microsoft YaHei"/>
+              </a:rPr>
+              <a:t>烟叶税纳税地点适用错误风险</a:t>
+            </a:r>
+          </a:p>
+          <a:p>
+            <a:pPr algn="just">
+              <a:lnSpc>
+                <a:spcPct val="110000"/>
+              </a:lnSpc>
+              <a:spcBef>
+                <a:spcPts val="0"/>
+              </a:spcBef>
+              <a:spcAft>
+                <a:spcPts val="0"/>
+              </a:spcAft>
+            </a:pPr>
+            <a:r>
+              <a:rPr sz="1600" b="1">
+                <a:solidFill>
+                  <a:srgbClr val="333333"/>
+                </a:solidFill>
+                <a:latin typeface="Microsoft YaHei"/>
+              </a:rPr>
+              <a:t>【风险描述】</a:t>
+            </a:r>
+          </a:p>
+          <a:p>
+            <a:pPr algn="just">
+              <a:lnSpc>
+                <a:spcPct val="110000"/>
+              </a:lnSpc>
+              <a:spcBef>
+                <a:spcPts val="0"/>
+              </a:spcBef>
+              <a:spcAft>
+                <a:spcPts val="0"/>
+              </a:spcAft>
+            </a:pPr>
+            <a:r>
+              <a:rPr sz="1400" b="0">
+                <a:solidFill>
+                  <a:srgbClr val="000000"/>
+                </a:solidFill>
+                <a:latin typeface="Microsoft YaHei"/>
+              </a:rPr>
+              <a:t>企业未按照规定向烟叶收购地税务机关申报缴纳烟叶税。</a:t>
+            </a:r>
+          </a:p>
+          <a:p>
+            <a:pPr algn="just">
+              <a:lnSpc>
+                <a:spcPct val="110000"/>
+              </a:lnSpc>
+              <a:spcBef>
+                <a:spcPts val="0"/>
+              </a:spcBef>
+              <a:spcAft>
+                <a:spcPts val="0"/>
+              </a:spcAft>
+            </a:pPr>
+            <a:r>
+              <a:rPr sz="1600" b="1">
+                <a:solidFill>
+                  <a:srgbClr val="1B5C9E"/>
+                </a:solidFill>
+                <a:latin typeface="Microsoft YaHei"/>
+              </a:rPr>
+              <a:t>【政策依据】</a:t>
+            </a:r>
+          </a:p>
+          <a:p>
+            <a:pPr algn="just">
+              <a:lnSpc>
+                <a:spcPct val="110000"/>
+              </a:lnSpc>
+              <a:spcBef>
+                <a:spcPts val="0"/>
+              </a:spcBef>
+              <a:spcAft>
+                <a:spcPts val="0"/>
+              </a:spcAft>
+            </a:pPr>
+            <a:r>
+              <a:rPr sz="1400" b="0">
+                <a:solidFill>
+                  <a:srgbClr val="000000"/>
+                </a:solidFill>
+                <a:latin typeface="Microsoft YaHei"/>
+              </a:rPr>
+              <a:t>根据《中华人民共和国烟叶税法》第七条的规定：纳税人应当向烟叶收购地的主管税务机关申报缴纳烟叶税。</a:t>
+            </a:r>
+          </a:p>
+          <a:p>
+            <a:pPr algn="just">
+              <a:lnSpc>
+                <a:spcPct val="110000"/>
+              </a:lnSpc>
+              <a:spcBef>
+                <a:spcPts val="0"/>
+              </a:spcBef>
+              <a:spcAft>
+                <a:spcPts val="0"/>
+              </a:spcAft>
+            </a:pPr>
+            <a:r>
+              <a:rPr sz="1600" b="1">
+                <a:solidFill>
+                  <a:srgbClr val="CC3333"/>
+                </a:solidFill>
+                <a:latin typeface="Microsoft YaHei"/>
+              </a:rPr>
+              <a:t>【预计风险】</a:t>
+            </a:r>
+          </a:p>
+          <a:p>
+            <a:pPr algn="just">
+              <a:lnSpc>
+                <a:spcPct val="110000"/>
+              </a:lnSpc>
+              <a:spcBef>
+                <a:spcPts val="0"/>
+              </a:spcBef>
+              <a:spcAft>
+                <a:spcPts val="0"/>
+              </a:spcAft>
+            </a:pPr>
+            <a:r>
+              <a:rPr sz="1400" b="0">
+                <a:solidFill>
+                  <a:srgbClr val="000000"/>
+                </a:solidFill>
+                <a:latin typeface="Microsoft YaHei"/>
+              </a:rPr>
+              <a:t>企业向机构所在地或其他非收购地税务机关申报缴纳烟叶税，导致烟叶税纳税地点错误，造成税款划转的风险。</a:t>
+            </a:r>
+          </a:p>
+          <a:p>
+            <a:pPr algn="just">
+              <a:lnSpc>
+                <a:spcPct val="110000"/>
+              </a:lnSpc>
+              <a:spcBef>
+                <a:spcPts val="0"/>
+              </a:spcBef>
+              <a:spcAft>
+                <a:spcPts val="0"/>
+              </a:spcAft>
+            </a:pPr>
+            <a:r>
+              <a:rPr sz="1600" b="1">
+                <a:solidFill>
+                  <a:srgbClr val="008040"/>
+                </a:solidFill>
+                <a:latin typeface="Microsoft YaHei"/>
+              </a:rPr>
+              <a:t>【解决方法】</a:t>
+            </a:r>
+          </a:p>
+          <a:p>
+            <a:pPr algn="just">
+              <a:lnSpc>
+                <a:spcPct val="110000"/>
+              </a:lnSpc>
+              <a:spcBef>
+                <a:spcPts val="0"/>
+              </a:spcBef>
+              <a:spcAft>
+                <a:spcPts val="0"/>
+              </a:spcAft>
+            </a:pPr>
+            <a:r>
+              <a:rPr sz="1400" b="0">
+                <a:solidFill>
+                  <a:srgbClr val="000000"/>
+                </a:solidFill>
+                <a:latin typeface="Microsoft YaHei"/>
+              </a:rPr>
               <a:t>企业应据实向烟叶收购地的主管税务机关申报纳税。</a:t>
             </a:r>
+          </a:p>
+        </p:txBody>
+      </p:sp>
+      <p:sp>
+        <p:nvSpPr>
+          <p:cNvPr id="4" name="Rectangle 3"/>
+          <p:cNvSpPr/>
+          <p:nvPr/>
+        </p:nvSpPr>
+        <p:spPr>
+          <a:xfrm>
+            <a:off x="457200" y="6720840"/>
+            <a:ext cx="11277295" cy="27432"/>
+          </a:xfrm>
+          <a:prstGeom prst="rect">
+            <a:avLst/>
+          </a:prstGeom>
+          <a:solidFill>
+            <a:srgbClr val="0D5E5E"/>
+          </a:solidFill>
+          <a:ln>
+            <a:noFill/>
+          </a:ln>
+        </p:spPr>
+        <p:style>
+          <a:lnRef idx="1">
+            <a:schemeClr val="accent1"/>
+          </a:lnRef>
+          <a:fillRef idx="3">
+            <a:schemeClr val="accent1"/>
+          </a:fillRef>
+          <a:effectRef idx="2">
+            <a:schemeClr val="accent1"/>
+          </a:effectRef>
+          <a:fontRef idx="minor">
+            <a:schemeClr val="lt1"/>
+          </a:fontRef>
+        </p:style>
+        <p:txBody>
+          <a:bodyPr rtlCol="0" anchor="ctr"/>
+          <a:lstStyle/>
+          <a:p>
+            <a:pPr algn="ctr"/>
           </a:p>
         </p:txBody>
       </p:sp>

--- a/ppts_output_v3/17_烟叶税风险指引.pptx
+++ b/ppts_output_v3/17_烟叶税风险指引.pptx
@@ -3169,6 +3169,7 @@
                 <a:solidFill>
                   <a:srgbClr val="FFFFFF"/>
                 </a:solidFill>
+                <a:latin typeface="Microsoft YaHei"/>
               </a:defRPr>
             </a:pPr>
             <a:r>
@@ -3247,6 +3248,7 @@
                 <a:solidFill>
                   <a:srgbClr val="CCCCCC"/>
                 </a:solidFill>
+                <a:latin typeface="Microsoft YaHei"/>
               </a:defRPr>
             </a:pPr>
             <a:r>
@@ -3282,6 +3284,7 @@
                 <a:solidFill>
                   <a:srgbClr val="AABBCC"/>
                 </a:solidFill>
+                <a:latin typeface="Microsoft YaHei"/>
               </a:defRPr>
             </a:pPr>
             <a:r>
@@ -3353,6 +3356,7 @@
                 <a:solidFill>
                   <a:srgbClr val="FFFFFF"/>
                 </a:solidFill>
+                <a:latin typeface="Microsoft YaHei"/>
               </a:rPr>
               <a:t>烟叶税风险指引  |  风险点 1</a:t>
             </a:r>
@@ -3686,6 +3690,7 @@
                 <a:solidFill>
                   <a:srgbClr val="FFFFFF"/>
                 </a:solidFill>
+                <a:latin typeface="Microsoft YaHei"/>
               </a:rPr>
               <a:t>烟叶税风险指引  |  风险点 2</a:t>
             </a:r>
@@ -4019,6 +4024,7 @@
                 <a:solidFill>
                   <a:srgbClr val="FFFFFF"/>
                 </a:solidFill>
+                <a:latin typeface="Microsoft YaHei"/>
               </a:rPr>
               <a:t>烟叶税风险指引  |  风险点 3</a:t>
             </a:r>
